--- a/Teaching/Chemistry/Labs/FCC Chem 3A Expt 12b Determination of Citric Acid in Soda.pptx
+++ b/Teaching/Chemistry/Labs/FCC Chem 3A Expt 12b Determination of Citric Acid in Soda.pptx
@@ -5,7 +5,7 @@
     <p:sldMasterId id="2147483803" r:id="rId1"/>
   </p:sldMasterIdLst>
   <p:notesMasterIdLst>
-    <p:notesMasterId r:id="rId18"/>
+    <p:notesMasterId r:id="rId19"/>
   </p:notesMasterIdLst>
   <p:sldIdLst>
     <p:sldId id="608" r:id="rId2"/>
@@ -14,16 +14,17 @@
     <p:sldId id="613" r:id="rId5"/>
     <p:sldId id="624" r:id="rId6"/>
     <p:sldId id="610" r:id="rId7"/>
-    <p:sldId id="625" r:id="rId8"/>
-    <p:sldId id="626" r:id="rId9"/>
-    <p:sldId id="627" r:id="rId10"/>
-    <p:sldId id="628" r:id="rId11"/>
-    <p:sldId id="621" r:id="rId12"/>
-    <p:sldId id="623" r:id="rId13"/>
-    <p:sldId id="629" r:id="rId14"/>
-    <p:sldId id="630" r:id="rId15"/>
-    <p:sldId id="631" r:id="rId16"/>
-    <p:sldId id="612" r:id="rId17"/>
+    <p:sldId id="632" r:id="rId8"/>
+    <p:sldId id="625" r:id="rId9"/>
+    <p:sldId id="626" r:id="rId10"/>
+    <p:sldId id="627" r:id="rId11"/>
+    <p:sldId id="628" r:id="rId12"/>
+    <p:sldId id="621" r:id="rId13"/>
+    <p:sldId id="623" r:id="rId14"/>
+    <p:sldId id="629" r:id="rId15"/>
+    <p:sldId id="630" r:id="rId16"/>
+    <p:sldId id="631" r:id="rId17"/>
+    <p:sldId id="612" r:id="rId18"/>
   </p:sldIdLst>
   <p:sldSz cx="9144000" cy="6858000" type="screen4x3"/>
   <p:notesSz cx="7315200" cy="9601200"/>
@@ -10327,6 +10328,143 @@
         <p:cNvPr id="1" name="">
           <a:extLst>
             <a:ext uri="{FF2B5EF4-FFF2-40B4-BE49-F238E27FC236}">
+              <a16:creationId xmlns:a16="http://schemas.microsoft.com/office/drawing/2014/main" id="{E8D80D32-0346-D500-B15B-E1E54834AE81}"/>
+            </a:ext>
+          </a:extLst>
+        </p:cNvPr>
+        <p:cNvGrpSpPr/>
+        <p:nvPr/>
+      </p:nvGrpSpPr>
+      <p:grpSpPr>
+        <a:xfrm>
+          <a:off x="0" y="0"/>
+          <a:ext cx="0" cy="0"/>
+          <a:chOff x="0" y="0"/>
+          <a:chExt cx="0" cy="0"/>
+        </a:xfrm>
+      </p:grpSpPr>
+      <p:sp>
+        <p:nvSpPr>
+          <p:cNvPr id="2" name="Title 1">
+            <a:extLst>
+              <a:ext uri="{FF2B5EF4-FFF2-40B4-BE49-F238E27FC236}">
+                <a16:creationId xmlns:a16="http://schemas.microsoft.com/office/drawing/2014/main" id="{6737EC1E-53AA-DE42-E643-9EE7E17C8537}"/>
+              </a:ext>
+            </a:extLst>
+          </p:cNvPr>
+          <p:cNvSpPr>
+            <a:spLocks noGrp="1"/>
+          </p:cNvSpPr>
+          <p:nvPr>
+            <p:ph type="title"/>
+          </p:nvPr>
+        </p:nvSpPr>
+        <p:spPr>
+          <a:xfrm>
+            <a:off x="338666" y="183025"/>
+            <a:ext cx="8421512" cy="769441"/>
+          </a:xfrm>
+        </p:spPr>
+        <p:txBody>
+          <a:bodyPr/>
+          <a:lstStyle/>
+          <a:p>
+            <a:r>
+              <a:rPr lang="en-US" sz="4400" dirty="0"/>
+              <a:t>Procedure</a:t>
+            </a:r>
+          </a:p>
+        </p:txBody>
+      </p:sp>
+      <p:sp>
+        <p:nvSpPr>
+          <p:cNvPr id="6" name="Content Placeholder 5">
+            <a:extLst>
+              <a:ext uri="{FF2B5EF4-FFF2-40B4-BE49-F238E27FC236}">
+                <a16:creationId xmlns:a16="http://schemas.microsoft.com/office/drawing/2014/main" id="{C845BD27-68B3-638C-6848-7B1736EE5D0B}"/>
+              </a:ext>
+            </a:extLst>
+          </p:cNvPr>
+          <p:cNvSpPr>
+            <a:spLocks noGrp="1"/>
+          </p:cNvSpPr>
+          <p:nvPr>
+            <p:ph idx="1"/>
+          </p:nvPr>
+        </p:nvSpPr>
+        <p:spPr>
+          <a:xfrm>
+            <a:off x="372533" y="952466"/>
+            <a:ext cx="8387645" cy="5595089"/>
+          </a:xfrm>
+        </p:spPr>
+        <p:txBody>
+          <a:bodyPr/>
+          <a:lstStyle/>
+          <a:p>
+            <a:pPr marL="0" indent="0">
+              <a:buNone/>
+            </a:pPr>
+            <a:r>
+              <a:rPr lang="en-US" i="1" dirty="0">
+                <a:solidFill>
+                  <a:srgbClr val="00FF00"/>
+                </a:solidFill>
+              </a:rPr>
+              <a:t>Part I-Standardization</a:t>
+            </a:r>
+          </a:p>
+          <a:p>
+            <a:pPr marL="457200" indent="-457200">
+              <a:buFont typeface="+mj-lt"/>
+              <a:buAutoNum type="arabicPeriod" startAt="12"/>
+            </a:pPr>
+            <a:r>
+              <a:rPr lang="en-US" dirty="0"/>
+              <a:t> Record the final </a:t>
+            </a:r>
+            <a:r>
+              <a:rPr lang="en-US" dirty="0" err="1"/>
+              <a:t>buret</a:t>
+            </a:r>
+            <a:r>
+              <a:rPr lang="en-US" dirty="0"/>
+              <a:t> reading</a:t>
+            </a:r>
+          </a:p>
+          <a:p>
+            <a:pPr marL="457200" indent="-457200">
+              <a:buFont typeface="+mj-lt"/>
+              <a:buAutoNum type="arabicPeriod" startAt="12"/>
+            </a:pPr>
+            <a:r>
+              <a:rPr lang="en-US" dirty="0"/>
+              <a:t> Repeat the standardization steps for additional trials, and especially if over-titrations occurred (the pink is too intense/bright)</a:t>
+            </a:r>
+          </a:p>
+        </p:txBody>
+      </p:sp>
+    </p:spTree>
+    <p:extLst>
+      <p:ext uri="{BB962C8B-B14F-4D97-AF65-F5344CB8AC3E}">
+        <p14:creationId xmlns:p14="http://schemas.microsoft.com/office/powerpoint/2010/main" val="3272621178"/>
+      </p:ext>
+    </p:extLst>
+  </p:cSld>
+  <p:clrMapOvr>
+    <a:masterClrMapping/>
+  </p:clrMapOvr>
+</p:sld>
+</file>
+
+<file path=ppt/slides/slide11.xml><?xml version="1.0" encoding="utf-8"?>
+<p:sld xmlns:a="http://schemas.openxmlformats.org/drawingml/2006/main" xmlns:r="http://schemas.openxmlformats.org/officeDocument/2006/relationships" xmlns:p="http://schemas.openxmlformats.org/presentationml/2006/main">
+  <p:cSld>
+    <p:spTree>
+      <p:nvGrpSpPr>
+        <p:cNvPr id="1" name="">
+          <a:extLst>
+            <a:ext uri="{FF2B5EF4-FFF2-40B4-BE49-F238E27FC236}">
               <a16:creationId xmlns:a16="http://schemas.microsoft.com/office/drawing/2014/main" id="{E74193DE-449A-944A-8E23-672B79ED60A1}"/>
             </a:ext>
           </a:extLst>
@@ -10514,7 +10652,7 @@
 </p:sld>
 </file>
 
-<file path=ppt/slides/slide11.xml><?xml version="1.0" encoding="utf-8"?>
+<file path=ppt/slides/slide12.xml><?xml version="1.0" encoding="utf-8"?>
 <p:sld xmlns:a="http://schemas.openxmlformats.org/drawingml/2006/main" xmlns:r="http://schemas.openxmlformats.org/officeDocument/2006/relationships" xmlns:p="http://schemas.openxmlformats.org/presentationml/2006/main">
   <p:cSld>
     <p:spTree>
@@ -10693,7 +10831,7 @@
 </p:sld>
 </file>
 
-<file path=ppt/slides/slide12.xml><?xml version="1.0" encoding="utf-8"?>
+<file path=ppt/slides/slide13.xml><?xml version="1.0" encoding="utf-8"?>
 <p:sld xmlns:a="http://schemas.openxmlformats.org/drawingml/2006/main" xmlns:r="http://schemas.openxmlformats.org/officeDocument/2006/relationships" xmlns:p="http://schemas.openxmlformats.org/presentationml/2006/main">
   <p:cSld>
     <p:spTree>
@@ -10734,7 +10872,7 @@
         </p:nvSpPr>
         <p:spPr>
           <a:xfrm>
-            <a:off x="349955" y="363788"/>
+            <a:off x="361244" y="214155"/>
             <a:ext cx="8421512" cy="830997"/>
           </a:xfrm>
         </p:spPr>
@@ -10745,7 +10883,7 @@
           <a:lstStyle/>
           <a:p>
             <a:r>
-              <a:rPr lang="en-US"/>
+              <a:rPr lang="en-US" dirty="0"/>
               <a:t>Example Data Analysis</a:t>
             </a:r>
           </a:p>
@@ -10753,10 +10891,10 @@
       </p:sp>
       <p:pic>
         <p:nvPicPr>
-          <p:cNvPr id="9" name="Picture 8">
+          <p:cNvPr id="4" name="Picture 3">
             <a:extLst>
               <a:ext uri="{FF2B5EF4-FFF2-40B4-BE49-F238E27FC236}">
-                <a16:creationId xmlns:a16="http://schemas.microsoft.com/office/drawing/2014/main" id="{E745AA7E-0492-7DC9-F5BF-21AFFA9F795B}"/>
+                <a16:creationId xmlns:a16="http://schemas.microsoft.com/office/drawing/2014/main" id="{BD9232CF-9183-9243-EFB1-D6F087F0C11B}"/>
               </a:ext>
             </a:extLst>
           </p:cNvPr>
@@ -10773,8 +10911,8 @@
         </p:blipFill>
         <p:spPr>
           <a:xfrm>
-            <a:off x="1891962" y="1194785"/>
-            <a:ext cx="5536954" cy="5455227"/>
+            <a:off x="1329816" y="1045151"/>
+            <a:ext cx="5686784" cy="5598693"/>
           </a:xfrm>
           <a:prstGeom prst="rect">
             <a:avLst/>
@@ -10794,7 +10932,7 @@
 </p:sld>
 </file>
 
-<file path=ppt/slides/slide13.xml><?xml version="1.0" encoding="utf-8"?>
+<file path=ppt/slides/slide14.xml><?xml version="1.0" encoding="utf-8"?>
 <p:sld xmlns:a="http://schemas.openxmlformats.org/drawingml/2006/main" xmlns:r="http://schemas.openxmlformats.org/officeDocument/2006/relationships" xmlns:p="http://schemas.openxmlformats.org/presentationml/2006/main">
   <p:cSld>
     <p:spTree>
@@ -10854,10 +10992,10 @@
       </p:sp>
       <p:pic>
         <p:nvPicPr>
-          <p:cNvPr id="6" name="Picture 5">
+          <p:cNvPr id="7" name="Picture 6">
             <a:extLst>
               <a:ext uri="{FF2B5EF4-FFF2-40B4-BE49-F238E27FC236}">
-                <a16:creationId xmlns:a16="http://schemas.microsoft.com/office/drawing/2014/main" id="{DE1666AF-18E7-AA60-9CD8-777B53EA66FB}"/>
+                <a16:creationId xmlns:a16="http://schemas.microsoft.com/office/drawing/2014/main" id="{D3AB55BE-06C2-0CEC-BFC7-4F3F541EC318}"/>
               </a:ext>
             </a:extLst>
           </p:cNvPr>
@@ -10874,8 +11012,8 @@
         </p:blipFill>
         <p:spPr>
           <a:xfrm>
-            <a:off x="1693940" y="1067261"/>
-            <a:ext cx="5896798" cy="5630061"/>
+            <a:off x="800099" y="1121034"/>
+            <a:ext cx="7306727" cy="5500702"/>
           </a:xfrm>
           <a:prstGeom prst="rect">
             <a:avLst/>
@@ -10895,7 +11033,7 @@
 </p:sld>
 </file>
 
-<file path=ppt/slides/slide14.xml><?xml version="1.0" encoding="utf-8"?>
+<file path=ppt/slides/slide15.xml><?xml version="1.0" encoding="utf-8"?>
 <p:sld xmlns:a="http://schemas.openxmlformats.org/drawingml/2006/main" xmlns:r="http://schemas.openxmlformats.org/officeDocument/2006/relationships" xmlns:p="http://schemas.openxmlformats.org/presentationml/2006/main">
   <p:cSld>
     <p:spTree>
@@ -10936,7 +11074,7 @@
         </p:nvSpPr>
         <p:spPr>
           <a:xfrm>
-            <a:off x="361243" y="312003"/>
+            <a:off x="361244" y="228876"/>
             <a:ext cx="8421512" cy="830997"/>
           </a:xfrm>
         </p:spPr>
@@ -10955,10 +11093,10 @@
       </p:sp>
       <p:pic>
         <p:nvPicPr>
-          <p:cNvPr id="5" name="Picture 4">
+          <p:cNvPr id="4" name="Picture 3">
             <a:extLst>
               <a:ext uri="{FF2B5EF4-FFF2-40B4-BE49-F238E27FC236}">
-                <a16:creationId xmlns:a16="http://schemas.microsoft.com/office/drawing/2014/main" id="{F68DADE9-0E17-E1A6-1167-0C774976BD05}"/>
+                <a16:creationId xmlns:a16="http://schemas.microsoft.com/office/drawing/2014/main" id="{ED865633-15DA-6EB4-C70D-6BDC4EBB3B2F}"/>
               </a:ext>
             </a:extLst>
           </p:cNvPr>
@@ -10975,8 +11113,8 @@
         </p:blipFill>
         <p:spPr>
           <a:xfrm>
-            <a:off x="2296391" y="1086297"/>
-            <a:ext cx="4983599" cy="5459699"/>
+            <a:off x="1745561" y="964202"/>
+            <a:ext cx="5267357" cy="5781984"/>
           </a:xfrm>
           <a:prstGeom prst="rect">
             <a:avLst/>
@@ -10996,7 +11134,7 @@
 </p:sld>
 </file>
 
-<file path=ppt/slides/slide15.xml><?xml version="1.0" encoding="utf-8"?>
+<file path=ppt/slides/slide16.xml><?xml version="1.0" encoding="utf-8"?>
 <p:sld xmlns:a="http://schemas.openxmlformats.org/drawingml/2006/main" xmlns:r="http://schemas.openxmlformats.org/officeDocument/2006/relationships" xmlns:p="http://schemas.openxmlformats.org/presentationml/2006/main">
   <p:cSld>
     <p:spTree>
@@ -11037,7 +11175,7 @@
         </p:nvSpPr>
         <p:spPr>
           <a:xfrm>
-            <a:off x="361243" y="312003"/>
+            <a:off x="361244" y="143584"/>
             <a:ext cx="8421512" cy="830997"/>
           </a:xfrm>
         </p:spPr>
@@ -11056,10 +11194,10 @@
       </p:sp>
       <p:pic>
         <p:nvPicPr>
-          <p:cNvPr id="4" name="Picture 3">
+          <p:cNvPr id="11" name="Picture 10">
             <a:extLst>
               <a:ext uri="{FF2B5EF4-FFF2-40B4-BE49-F238E27FC236}">
-                <a16:creationId xmlns:a16="http://schemas.microsoft.com/office/drawing/2014/main" id="{2E721DEA-BCCF-DF4A-0B95-6A1100848C2D}"/>
+                <a16:creationId xmlns:a16="http://schemas.microsoft.com/office/drawing/2014/main" id="{9A8CCCCE-49F4-4C33-B08E-B98ABB7B1768}"/>
               </a:ext>
             </a:extLst>
           </p:cNvPr>
@@ -11076,8 +11214,8 @@
         </p:blipFill>
         <p:spPr>
           <a:xfrm>
-            <a:off x="1943100" y="842448"/>
-            <a:ext cx="6114042" cy="6015551"/>
+            <a:off x="1557631" y="974581"/>
+            <a:ext cx="5640253" cy="5626204"/>
           </a:xfrm>
           <a:prstGeom prst="rect">
             <a:avLst/>
@@ -11097,7 +11235,7 @@
 </p:sld>
 </file>
 
-<file path=ppt/slides/slide16.xml><?xml version="1.0" encoding="utf-8"?>
+<file path=ppt/slides/slide17.xml><?xml version="1.0" encoding="utf-8"?>
 <p:sld xmlns:a="http://schemas.openxmlformats.org/drawingml/2006/main" xmlns:r="http://schemas.openxmlformats.org/officeDocument/2006/relationships" xmlns:p="http://schemas.openxmlformats.org/presentationml/2006/main">
   <p:cSld>
     <p:spTree>
@@ -11776,95 +11914,41 @@
               <a:buNone/>
             </a:pPr>
             <a:r>
-              <a:rPr lang="en-US" i="1" dirty="0">
+              <a:rPr lang="en-US" dirty="0"/>
+              <a:t>This experiment has two parts</a:t>
+            </a:r>
+          </a:p>
+          <a:p>
+            <a:r>
+              <a:rPr lang="en-US" dirty="0"/>
+              <a:t>In part 1, you will do at least 3 trials of </a:t>
+            </a:r>
+            <a:r>
+              <a:rPr lang="en-US" dirty="0">
                 <a:solidFill>
-                  <a:srgbClr val="00FF00"/>
+                  <a:schemeClr val="accent1">
+                    <a:lumMod val="60000"/>
+                    <a:lumOff val="40000"/>
+                  </a:schemeClr>
                 </a:solidFill>
               </a:rPr>
-              <a:t>Preparing the </a:t>
-            </a:r>
-            <a:r>
-              <a:rPr lang="en-US" i="1" dirty="0" err="1">
-                <a:solidFill>
-                  <a:srgbClr val="00FF00"/>
-                </a:solidFill>
-              </a:rPr>
-              <a:t>buret</a:t>
-            </a:r>
-            <a:endParaRPr lang="en-US" i="1" dirty="0">
-              <a:solidFill>
-                <a:srgbClr val="00FF00"/>
-              </a:solidFill>
-            </a:endParaRPr>
-          </a:p>
-          <a:p>
-            <a:pPr marL="457200" indent="-457200">
-              <a:buFont typeface="+mj-lt"/>
-              <a:buAutoNum type="arabicPeriod"/>
-            </a:pPr>
+              <a:t>standardizing the concentration of a NaOH solution </a:t>
+            </a:r>
             <a:r>
               <a:rPr lang="en-US" dirty="0"/>
-              <a:t>Rinse the </a:t>
-            </a:r>
-            <a:r>
-              <a:rPr lang="en-US" dirty="0" err="1"/>
-              <a:t>buret</a:t>
-            </a:r>
+              <a:t>using oxalic acid dihydrate. This involves getting a mass of oxalic acid on the balance, dissolving it, and neutralizing it with a color pH indicator to its endpoint</a:t>
+            </a:r>
+          </a:p>
+          <a:p>
             <a:r>
               <a:rPr lang="en-US" dirty="0"/>
-              <a:t> with 5 mL DI water three times (turn </a:t>
-            </a:r>
-            <a:r>
-              <a:rPr lang="en-US" dirty="0" err="1"/>
-              <a:t>buret</a:t>
-            </a:r>
+              <a:t>In part 2, you will use the NaOH solution to neutralize another acid, citric acid, determining the volume you used, to determine the concentration of the acid in a soft drink. This too will be done in 3 trials</a:t>
+            </a:r>
+          </a:p>
+          <a:p>
             <a:r>
               <a:rPr lang="en-US" dirty="0"/>
-              <a:t> on side and rotate it). Collect the rinse in a large waste beaker.</a:t>
-            </a:r>
-          </a:p>
-          <a:p>
-            <a:pPr marL="457200" indent="-457200">
-              <a:buFont typeface="+mj-lt"/>
-              <a:buAutoNum type="arabicPeriod"/>
-            </a:pPr>
-            <a:r>
-              <a:rPr lang="en-US" dirty="0"/>
-              <a:t>Repeat rinsing but with 5 mL of the titrant NaOH solution</a:t>
-            </a:r>
-          </a:p>
-          <a:p>
-            <a:pPr marL="457200" indent="-457200">
-              <a:buFont typeface="+mj-lt"/>
-              <a:buAutoNum type="arabicPeriod"/>
-            </a:pPr>
-            <a:r>
-              <a:rPr lang="en-US" dirty="0"/>
-              <a:t>Clamp the </a:t>
-            </a:r>
-            <a:r>
-              <a:rPr lang="en-US" dirty="0" err="1"/>
-              <a:t>buret</a:t>
-            </a:r>
-            <a:r>
-              <a:rPr lang="en-US" dirty="0"/>
-              <a:t> to the stand and with the waste beaker under it and stopcock open, add several mL to </a:t>
-            </a:r>
-            <a:r>
-              <a:rPr lang="en-US" dirty="0" err="1"/>
-              <a:t>buret</a:t>
-            </a:r>
-            <a:r>
-              <a:rPr lang="en-US" dirty="0"/>
-              <a:t>. As it flows, close stopcock. Ensure flow has filled </a:t>
-            </a:r>
-            <a:r>
-              <a:rPr lang="en-US" dirty="0" err="1"/>
-              <a:t>buret</a:t>
-            </a:r>
-            <a:r>
-              <a:rPr lang="en-US" dirty="0"/>
-              <a:t> tip</a:t>
+              <a:t>In each trial of all parts, it is necessary to achieve the proper color of the indicator to be accurate</a:t>
             </a:r>
           </a:p>
         </p:txBody>
@@ -11883,6 +11967,198 @@
 </file>
 
 <file path=ppt/slides/slide7.xml><?xml version="1.0" encoding="utf-8"?>
+<p:sld xmlns:a="http://schemas.openxmlformats.org/drawingml/2006/main" xmlns:r="http://schemas.openxmlformats.org/officeDocument/2006/relationships" xmlns:p="http://schemas.openxmlformats.org/presentationml/2006/main">
+  <p:cSld>
+    <p:spTree>
+      <p:nvGrpSpPr>
+        <p:cNvPr id="1" name="">
+          <a:extLst>
+            <a:ext uri="{FF2B5EF4-FFF2-40B4-BE49-F238E27FC236}">
+              <a16:creationId xmlns:a16="http://schemas.microsoft.com/office/drawing/2014/main" id="{49CD2643-DD36-56C5-8BE8-01182BD156D7}"/>
+            </a:ext>
+          </a:extLst>
+        </p:cNvPr>
+        <p:cNvGrpSpPr/>
+        <p:nvPr/>
+      </p:nvGrpSpPr>
+      <p:grpSpPr>
+        <a:xfrm>
+          <a:off x="0" y="0"/>
+          <a:ext cx="0" cy="0"/>
+          <a:chOff x="0" y="0"/>
+          <a:chExt cx="0" cy="0"/>
+        </a:xfrm>
+      </p:grpSpPr>
+      <p:sp>
+        <p:nvSpPr>
+          <p:cNvPr id="2" name="Title 1">
+            <a:extLst>
+              <a:ext uri="{FF2B5EF4-FFF2-40B4-BE49-F238E27FC236}">
+                <a16:creationId xmlns:a16="http://schemas.microsoft.com/office/drawing/2014/main" id="{C9B2387C-524E-72F4-EB6F-E149226C8A92}"/>
+              </a:ext>
+            </a:extLst>
+          </p:cNvPr>
+          <p:cNvSpPr>
+            <a:spLocks noGrp="1"/>
+          </p:cNvSpPr>
+          <p:nvPr>
+            <p:ph type="title"/>
+          </p:nvPr>
+        </p:nvSpPr>
+        <p:spPr>
+          <a:xfrm>
+            <a:off x="338666" y="183025"/>
+            <a:ext cx="8421512" cy="769441"/>
+          </a:xfrm>
+        </p:spPr>
+        <p:txBody>
+          <a:bodyPr/>
+          <a:lstStyle/>
+          <a:p>
+            <a:r>
+              <a:rPr lang="en-US" sz="4400" dirty="0"/>
+              <a:t>Procedure</a:t>
+            </a:r>
+          </a:p>
+        </p:txBody>
+      </p:sp>
+      <p:sp>
+        <p:nvSpPr>
+          <p:cNvPr id="6" name="Content Placeholder 5">
+            <a:extLst>
+              <a:ext uri="{FF2B5EF4-FFF2-40B4-BE49-F238E27FC236}">
+                <a16:creationId xmlns:a16="http://schemas.microsoft.com/office/drawing/2014/main" id="{0B14C9E4-E27D-6C8A-FF93-80BD89128698}"/>
+              </a:ext>
+            </a:extLst>
+          </p:cNvPr>
+          <p:cNvSpPr>
+            <a:spLocks noGrp="1"/>
+          </p:cNvSpPr>
+          <p:nvPr>
+            <p:ph idx="1"/>
+          </p:nvPr>
+        </p:nvSpPr>
+        <p:spPr>
+          <a:xfrm>
+            <a:off x="372533" y="952466"/>
+            <a:ext cx="8387645" cy="5595089"/>
+          </a:xfrm>
+        </p:spPr>
+        <p:txBody>
+          <a:bodyPr/>
+          <a:lstStyle/>
+          <a:p>
+            <a:pPr marL="0" indent="0">
+              <a:buNone/>
+            </a:pPr>
+            <a:r>
+              <a:rPr lang="en-US" i="1" dirty="0">
+                <a:solidFill>
+                  <a:srgbClr val="00FF00"/>
+                </a:solidFill>
+              </a:rPr>
+              <a:t>Preparing the </a:t>
+            </a:r>
+            <a:r>
+              <a:rPr lang="en-US" i="1" dirty="0" err="1">
+                <a:solidFill>
+                  <a:srgbClr val="00FF00"/>
+                </a:solidFill>
+              </a:rPr>
+              <a:t>buret</a:t>
+            </a:r>
+            <a:endParaRPr lang="en-US" i="1" dirty="0">
+              <a:solidFill>
+                <a:srgbClr val="00FF00"/>
+              </a:solidFill>
+            </a:endParaRPr>
+          </a:p>
+          <a:p>
+            <a:pPr marL="457200" indent="-457200">
+              <a:buFont typeface="+mj-lt"/>
+              <a:buAutoNum type="arabicPeriod"/>
+            </a:pPr>
+            <a:r>
+              <a:rPr lang="en-US" dirty="0"/>
+              <a:t>Rinse the </a:t>
+            </a:r>
+            <a:r>
+              <a:rPr lang="en-US" dirty="0" err="1"/>
+              <a:t>buret</a:t>
+            </a:r>
+            <a:r>
+              <a:rPr lang="en-US" dirty="0"/>
+              <a:t> with 5 mL DI water three times (turn </a:t>
+            </a:r>
+            <a:r>
+              <a:rPr lang="en-US" dirty="0" err="1"/>
+              <a:t>buret</a:t>
+            </a:r>
+            <a:r>
+              <a:rPr lang="en-US" dirty="0"/>
+              <a:t> on side and rotate it). Collect the rinse in a large waste beaker.</a:t>
+            </a:r>
+          </a:p>
+          <a:p>
+            <a:pPr marL="457200" indent="-457200">
+              <a:buFont typeface="+mj-lt"/>
+              <a:buAutoNum type="arabicPeriod"/>
+            </a:pPr>
+            <a:r>
+              <a:rPr lang="en-US" dirty="0"/>
+              <a:t>Repeat rinsing but with 5 mL of the titrant NaOH solution</a:t>
+            </a:r>
+          </a:p>
+          <a:p>
+            <a:pPr marL="457200" indent="-457200">
+              <a:buFont typeface="+mj-lt"/>
+              <a:buAutoNum type="arabicPeriod"/>
+            </a:pPr>
+            <a:r>
+              <a:rPr lang="en-US" dirty="0"/>
+              <a:t>Clamp the </a:t>
+            </a:r>
+            <a:r>
+              <a:rPr lang="en-US" dirty="0" err="1"/>
+              <a:t>buret</a:t>
+            </a:r>
+            <a:r>
+              <a:rPr lang="en-US" dirty="0"/>
+              <a:t> to the stand and with the waste beaker under it and stopcock open, add several mL to </a:t>
+            </a:r>
+            <a:r>
+              <a:rPr lang="en-US" dirty="0" err="1"/>
+              <a:t>buret</a:t>
+            </a:r>
+            <a:r>
+              <a:rPr lang="en-US" dirty="0"/>
+              <a:t>. As it flows, close stopcock. Ensure flow has filled </a:t>
+            </a:r>
+            <a:r>
+              <a:rPr lang="en-US" dirty="0" err="1"/>
+              <a:t>buret</a:t>
+            </a:r>
+            <a:r>
+              <a:rPr lang="en-US" dirty="0"/>
+              <a:t> tip</a:t>
+            </a:r>
+          </a:p>
+        </p:txBody>
+      </p:sp>
+    </p:spTree>
+    <p:extLst>
+      <p:ext uri="{BB962C8B-B14F-4D97-AF65-F5344CB8AC3E}">
+        <p14:creationId xmlns:p14="http://schemas.microsoft.com/office/powerpoint/2010/main" val="206461902"/>
+      </p:ext>
+    </p:extLst>
+  </p:cSld>
+  <p:clrMapOvr>
+    <a:masterClrMapping/>
+  </p:clrMapOvr>
+</p:sld>
+</file>
+
+<file path=ppt/slides/slide8.xml><?xml version="1.0" encoding="utf-8"?>
 <p:sld xmlns:a="http://schemas.openxmlformats.org/drawingml/2006/main" xmlns:r="http://schemas.openxmlformats.org/officeDocument/2006/relationships" xmlns:p="http://schemas.openxmlformats.org/presentationml/2006/main">
   <p:cSld>
     <p:spTree>
@@ -12087,7 +12363,7 @@
 </p:sld>
 </file>
 
-<file path=ppt/slides/slide8.xml><?xml version="1.0" encoding="utf-8"?>
+<file path=ppt/slides/slide9.xml><?xml version="1.0" encoding="utf-8"?>
 <p:sld xmlns:a="http://schemas.openxmlformats.org/drawingml/2006/main" xmlns:r="http://schemas.openxmlformats.org/officeDocument/2006/relationships" xmlns:p="http://schemas.openxmlformats.org/presentationml/2006/main">
   <p:cSld>
     <p:spTree>
@@ -12242,143 +12518,6 @@
     <p:extLst>
       <p:ext uri="{BB962C8B-B14F-4D97-AF65-F5344CB8AC3E}">
         <p14:creationId xmlns:p14="http://schemas.microsoft.com/office/powerpoint/2010/main" val="3378126116"/>
-      </p:ext>
-    </p:extLst>
-  </p:cSld>
-  <p:clrMapOvr>
-    <a:masterClrMapping/>
-  </p:clrMapOvr>
-</p:sld>
-</file>
-
-<file path=ppt/slides/slide9.xml><?xml version="1.0" encoding="utf-8"?>
-<p:sld xmlns:a="http://schemas.openxmlformats.org/drawingml/2006/main" xmlns:r="http://schemas.openxmlformats.org/officeDocument/2006/relationships" xmlns:p="http://schemas.openxmlformats.org/presentationml/2006/main">
-  <p:cSld>
-    <p:spTree>
-      <p:nvGrpSpPr>
-        <p:cNvPr id="1" name="">
-          <a:extLst>
-            <a:ext uri="{FF2B5EF4-FFF2-40B4-BE49-F238E27FC236}">
-              <a16:creationId xmlns:a16="http://schemas.microsoft.com/office/drawing/2014/main" id="{E8D80D32-0346-D500-B15B-E1E54834AE81}"/>
-            </a:ext>
-          </a:extLst>
-        </p:cNvPr>
-        <p:cNvGrpSpPr/>
-        <p:nvPr/>
-      </p:nvGrpSpPr>
-      <p:grpSpPr>
-        <a:xfrm>
-          <a:off x="0" y="0"/>
-          <a:ext cx="0" cy="0"/>
-          <a:chOff x="0" y="0"/>
-          <a:chExt cx="0" cy="0"/>
-        </a:xfrm>
-      </p:grpSpPr>
-      <p:sp>
-        <p:nvSpPr>
-          <p:cNvPr id="2" name="Title 1">
-            <a:extLst>
-              <a:ext uri="{FF2B5EF4-FFF2-40B4-BE49-F238E27FC236}">
-                <a16:creationId xmlns:a16="http://schemas.microsoft.com/office/drawing/2014/main" id="{6737EC1E-53AA-DE42-E643-9EE7E17C8537}"/>
-              </a:ext>
-            </a:extLst>
-          </p:cNvPr>
-          <p:cNvSpPr>
-            <a:spLocks noGrp="1"/>
-          </p:cNvSpPr>
-          <p:nvPr>
-            <p:ph type="title"/>
-          </p:nvPr>
-        </p:nvSpPr>
-        <p:spPr>
-          <a:xfrm>
-            <a:off x="338666" y="183025"/>
-            <a:ext cx="8421512" cy="769441"/>
-          </a:xfrm>
-        </p:spPr>
-        <p:txBody>
-          <a:bodyPr/>
-          <a:lstStyle/>
-          <a:p>
-            <a:r>
-              <a:rPr lang="en-US" sz="4400" dirty="0"/>
-              <a:t>Procedure</a:t>
-            </a:r>
-          </a:p>
-        </p:txBody>
-      </p:sp>
-      <p:sp>
-        <p:nvSpPr>
-          <p:cNvPr id="6" name="Content Placeholder 5">
-            <a:extLst>
-              <a:ext uri="{FF2B5EF4-FFF2-40B4-BE49-F238E27FC236}">
-                <a16:creationId xmlns:a16="http://schemas.microsoft.com/office/drawing/2014/main" id="{C845BD27-68B3-638C-6848-7B1736EE5D0B}"/>
-              </a:ext>
-            </a:extLst>
-          </p:cNvPr>
-          <p:cNvSpPr>
-            <a:spLocks noGrp="1"/>
-          </p:cNvSpPr>
-          <p:nvPr>
-            <p:ph idx="1"/>
-          </p:nvPr>
-        </p:nvSpPr>
-        <p:spPr>
-          <a:xfrm>
-            <a:off x="372533" y="952466"/>
-            <a:ext cx="8387645" cy="5595089"/>
-          </a:xfrm>
-        </p:spPr>
-        <p:txBody>
-          <a:bodyPr/>
-          <a:lstStyle/>
-          <a:p>
-            <a:pPr marL="0" indent="0">
-              <a:buNone/>
-            </a:pPr>
-            <a:r>
-              <a:rPr lang="en-US" i="1" dirty="0">
-                <a:solidFill>
-                  <a:srgbClr val="00FF00"/>
-                </a:solidFill>
-              </a:rPr>
-              <a:t>Part I-Standardization</a:t>
-            </a:r>
-          </a:p>
-          <a:p>
-            <a:pPr marL="457200" indent="-457200">
-              <a:buFont typeface="+mj-lt"/>
-              <a:buAutoNum type="arabicPeriod" startAt="12"/>
-            </a:pPr>
-            <a:r>
-              <a:rPr lang="en-US" dirty="0"/>
-              <a:t> Record the final </a:t>
-            </a:r>
-            <a:r>
-              <a:rPr lang="en-US" dirty="0" err="1"/>
-              <a:t>buret</a:t>
-            </a:r>
-            <a:r>
-              <a:rPr lang="en-US" dirty="0"/>
-              <a:t> reading</a:t>
-            </a:r>
-          </a:p>
-          <a:p>
-            <a:pPr marL="457200" indent="-457200">
-              <a:buFont typeface="+mj-lt"/>
-              <a:buAutoNum type="arabicPeriod" startAt="12"/>
-            </a:pPr>
-            <a:r>
-              <a:rPr lang="en-US" dirty="0"/>
-              <a:t> Repeat the standardization steps for additional trials, and especially if over-titrations occurred (the pink is too intense/bright)</a:t>
-            </a:r>
-          </a:p>
-        </p:txBody>
-      </p:sp>
-    </p:spTree>
-    <p:extLst>
-      <p:ext uri="{BB962C8B-B14F-4D97-AF65-F5344CB8AC3E}">
-        <p14:creationId xmlns:p14="http://schemas.microsoft.com/office/powerpoint/2010/main" val="3272621178"/>
       </p:ext>
     </p:extLst>
   </p:cSld>

--- a/Teaching/Chemistry/Labs/FCC Chem 3A Expt 12b Determination of Citric Acid in Soda.pptx
+++ b/Teaching/Chemistry/Labs/FCC Chem 3A Expt 12b Determination of Citric Acid in Soda.pptx
@@ -11303,25 +11303,18 @@
           <a:p>
             <a:r>
               <a:rPr lang="en-US" dirty="0"/>
-              <a:t>The copper sulfide product goes into solids waste container</a:t>
-            </a:r>
+              <a:t>Pour waste solutions in the aqueous solution carboy located in the fume hood (</a:t>
+            </a:r>
+            <a:r>
+              <a:rPr lang="en-US"/>
+              <a:t>usually placed near door)</a:t>
+            </a:r>
+            <a:endParaRPr lang="en-US" dirty="0"/>
           </a:p>
           <a:p>
             <a:r>
               <a:rPr lang="en-US" dirty="0"/>
-              <a:t>WITHOUT AT ALL GETTING CRUCIBLE WET WITH ANY WATER, wipe crucible with dry paper towel</a:t>
-            </a:r>
-          </a:p>
-          <a:p>
-            <a:r>
-              <a:rPr lang="en-US" dirty="0"/>
-              <a:t>Use soapy water to clean the watch glass</a:t>
-            </a:r>
-          </a:p>
-          <a:p>
-            <a:r>
-              <a:rPr lang="en-US" dirty="0"/>
-              <a:t>Place all other items in appropriate locations</a:t>
+              <a:t>Clean up other equipment as done previously in the lab</a:t>
             </a:r>
           </a:p>
         </p:txBody>

--- a/Teaching/Chemistry/Labs/FCC Chem 3A Expt 12b Determination of Citric Acid in Soda.pptx
+++ b/Teaching/Chemistry/Labs/FCC Chem 3A Expt 12b Determination of Citric Acid in Soda.pptx
@@ -5,26 +5,29 @@
     <p:sldMasterId id="2147483803" r:id="rId1"/>
   </p:sldMasterIdLst>
   <p:notesMasterIdLst>
-    <p:notesMasterId r:id="rId19"/>
+    <p:notesMasterId r:id="rId22"/>
   </p:notesMasterIdLst>
   <p:sldIdLst>
     <p:sldId id="608" r:id="rId2"/>
-    <p:sldId id="609" r:id="rId3"/>
-    <p:sldId id="616" r:id="rId4"/>
-    <p:sldId id="613" r:id="rId5"/>
-    <p:sldId id="624" r:id="rId6"/>
-    <p:sldId id="610" r:id="rId7"/>
-    <p:sldId id="632" r:id="rId8"/>
-    <p:sldId id="625" r:id="rId9"/>
-    <p:sldId id="626" r:id="rId10"/>
-    <p:sldId id="627" r:id="rId11"/>
-    <p:sldId id="628" r:id="rId12"/>
-    <p:sldId id="621" r:id="rId13"/>
-    <p:sldId id="623" r:id="rId14"/>
-    <p:sldId id="629" r:id="rId15"/>
-    <p:sldId id="630" r:id="rId16"/>
-    <p:sldId id="631" r:id="rId17"/>
-    <p:sldId id="612" r:id="rId18"/>
+    <p:sldId id="633" r:id="rId3"/>
+    <p:sldId id="609" r:id="rId4"/>
+    <p:sldId id="634" r:id="rId5"/>
+    <p:sldId id="635" r:id="rId6"/>
+    <p:sldId id="616" r:id="rId7"/>
+    <p:sldId id="613" r:id="rId8"/>
+    <p:sldId id="624" r:id="rId9"/>
+    <p:sldId id="610" r:id="rId10"/>
+    <p:sldId id="632" r:id="rId11"/>
+    <p:sldId id="625" r:id="rId12"/>
+    <p:sldId id="626" r:id="rId13"/>
+    <p:sldId id="627" r:id="rId14"/>
+    <p:sldId id="628" r:id="rId15"/>
+    <p:sldId id="612" r:id="rId16"/>
+    <p:sldId id="621" r:id="rId17"/>
+    <p:sldId id="623" r:id="rId18"/>
+    <p:sldId id="629" r:id="rId19"/>
+    <p:sldId id="630" r:id="rId20"/>
+    <p:sldId id="631" r:id="rId21"/>
   </p:sldIdLst>
   <p:sldSz cx="9144000" cy="6858000" type="screen4x3"/>
   <p:notesSz cx="7315200" cy="9601200"/>
@@ -1948,6 +1951,48 @@
           </a:p>
         </p:txBody>
       </p:sp>
+      <p:sp>
+        <p:nvSpPr>
+          <p:cNvPr id="4" name="Slide Number Placeholder 3">
+            <a:extLst>
+              <a:ext uri="{FF2B5EF4-FFF2-40B4-BE49-F238E27FC236}">
+                <a16:creationId xmlns:a16="http://schemas.microsoft.com/office/drawing/2014/main" id="{9C760D55-B878-15EB-F5F6-D3E0A600A6E6}"/>
+              </a:ext>
+            </a:extLst>
+          </p:cNvPr>
+          <p:cNvSpPr>
+            <a:spLocks noGrp="1"/>
+          </p:cNvSpPr>
+          <p:nvPr>
+            <p:ph type="sldNum" sz="quarter" idx="10"/>
+          </p:nvPr>
+        </p:nvSpPr>
+        <p:spPr/>
+        <p:txBody>
+          <a:bodyPr/>
+          <a:lstStyle>
+            <a:lvl1pPr>
+              <a:defRPr>
+                <a:solidFill>
+                  <a:schemeClr val="bg1"/>
+                </a:solidFill>
+              </a:defRPr>
+            </a:lvl1pPr>
+          </a:lstStyle>
+          <a:p>
+            <a:fld id="{DA7C98CF-2420-4B97-8881-079E520414F2}" type="slidenum">
+              <a:rPr lang="en-US" smtClean="0"/>
+              <a:pPr/>
+              <a:t>‹#›</a:t>
+            </a:fld>
+            <a:endParaRPr lang="en-US" dirty="0">
+              <a:solidFill>
+                <a:schemeClr val="bg1"/>
+              </a:solidFill>
+            </a:endParaRPr>
+          </a:p>
+        </p:txBody>
+      </p:sp>
     </p:spTree>
     <p:extLst>
       <p:ext uri="{BB962C8B-B14F-4D97-AF65-F5344CB8AC3E}">
@@ -3244,38 +3289,83 @@
           <a:p>
             <a:pPr lvl="0"/>
             <a:r>
-              <a:rPr lang="en-US"/>
+              <a:rPr lang="en-US" dirty="0"/>
               <a:t>Click to edit Master text styles</a:t>
             </a:r>
           </a:p>
           <a:p>
             <a:pPr lvl="1"/>
             <a:r>
-              <a:rPr lang="en-US"/>
+              <a:rPr lang="en-US" dirty="0"/>
               <a:t>Second level</a:t>
             </a:r>
           </a:p>
           <a:p>
             <a:pPr lvl="2"/>
             <a:r>
-              <a:rPr lang="en-US"/>
+              <a:rPr lang="en-US" dirty="0"/>
               <a:t>Third level</a:t>
             </a:r>
           </a:p>
           <a:p>
             <a:pPr lvl="3"/>
             <a:r>
-              <a:rPr lang="en-US"/>
+              <a:rPr lang="en-US" dirty="0"/>
               <a:t>Fourth level</a:t>
             </a:r>
           </a:p>
           <a:p>
             <a:pPr lvl="4"/>
             <a:r>
-              <a:rPr lang="en-US"/>
+              <a:rPr lang="en-US" dirty="0"/>
               <a:t>Fifth level</a:t>
             </a:r>
-            <a:endParaRPr lang="en-US" dirty="0"/>
+          </a:p>
+        </p:txBody>
+      </p:sp>
+      <p:sp>
+        <p:nvSpPr>
+          <p:cNvPr id="2" name="Slide Number Placeholder 1">
+            <a:extLst>
+              <a:ext uri="{FF2B5EF4-FFF2-40B4-BE49-F238E27FC236}">
+                <a16:creationId xmlns:a16="http://schemas.microsoft.com/office/drawing/2014/main" id="{3104762B-5130-DD95-BA01-D259C1958E2D}"/>
+              </a:ext>
+            </a:extLst>
+          </p:cNvPr>
+          <p:cNvSpPr>
+            <a:spLocks noGrp="1"/>
+          </p:cNvSpPr>
+          <p:nvPr>
+            <p:ph type="sldNum" sz="quarter" idx="4"/>
+          </p:nvPr>
+        </p:nvSpPr>
+        <p:spPr>
+          <a:xfrm>
+            <a:off x="6986868" y="6364992"/>
+            <a:ext cx="2057400" cy="365125"/>
+          </a:xfrm>
+          <a:prstGeom prst="rect">
+            <a:avLst/>
+          </a:prstGeom>
+        </p:spPr>
+        <p:txBody>
+          <a:bodyPr vert="horz" lIns="91440" tIns="45720" rIns="91440" bIns="45720" rtlCol="0" anchor="ctr"/>
+          <a:lstStyle>
+            <a:lvl1pPr algn="r">
+              <a:defRPr sz="1200" b="1">
+                <a:solidFill>
+                  <a:srgbClr val="FFFF00"/>
+                </a:solidFill>
+              </a:defRPr>
+            </a:lvl1pPr>
+          </a:lstStyle>
+          <a:p>
+            <a:fld id="{DA7C98CF-2420-4B97-8881-079E520414F2}" type="slidenum">
+              <a:rPr lang="en-US" smtClean="0"/>
+              <a:pPr/>
+              <a:t>‹#›</a:t>
+            </a:fld>
+            <a:endParaRPr lang="en-US" b="1" dirty="0"/>
           </a:p>
         </p:txBody>
       </p:sp>
@@ -3305,7 +3395,7 @@
     <p:sldLayoutId id="2147483818" r:id="rId15"/>
     <p:sldLayoutId id="2147483802" r:id="rId16"/>
   </p:sldLayoutIdLst>
-  <p:hf sldNum="0" hdr="0" ftr="0" dt="0"/>
+  <p:hf hdr="0" ftr="0" dt="0"/>
   <p:txStyles>
     <p:titleStyle>
       <a:lvl1pPr algn="l" rtl="0" eaLnBrk="1" fontAlgn="base" hangingPunct="1">
@@ -10328,6 +10418,657 @@
         <p:cNvPr id="1" name="">
           <a:extLst>
             <a:ext uri="{FF2B5EF4-FFF2-40B4-BE49-F238E27FC236}">
+              <a16:creationId xmlns:a16="http://schemas.microsoft.com/office/drawing/2014/main" id="{49CD2643-DD36-56C5-8BE8-01182BD156D7}"/>
+            </a:ext>
+          </a:extLst>
+        </p:cNvPr>
+        <p:cNvGrpSpPr/>
+        <p:nvPr/>
+      </p:nvGrpSpPr>
+      <p:grpSpPr>
+        <a:xfrm>
+          <a:off x="0" y="0"/>
+          <a:ext cx="0" cy="0"/>
+          <a:chOff x="0" y="0"/>
+          <a:chExt cx="0" cy="0"/>
+        </a:xfrm>
+      </p:grpSpPr>
+      <p:sp>
+        <p:nvSpPr>
+          <p:cNvPr id="2" name="Title 1">
+            <a:extLst>
+              <a:ext uri="{FF2B5EF4-FFF2-40B4-BE49-F238E27FC236}">
+                <a16:creationId xmlns:a16="http://schemas.microsoft.com/office/drawing/2014/main" id="{C9B2387C-524E-72F4-EB6F-E149226C8A92}"/>
+              </a:ext>
+            </a:extLst>
+          </p:cNvPr>
+          <p:cNvSpPr>
+            <a:spLocks noGrp="1"/>
+          </p:cNvSpPr>
+          <p:nvPr>
+            <p:ph type="title"/>
+          </p:nvPr>
+        </p:nvSpPr>
+        <p:spPr>
+          <a:xfrm>
+            <a:off x="338666" y="183025"/>
+            <a:ext cx="8421512" cy="769441"/>
+          </a:xfrm>
+        </p:spPr>
+        <p:txBody>
+          <a:bodyPr/>
+          <a:lstStyle/>
+          <a:p>
+            <a:r>
+              <a:rPr lang="en-US" sz="4400" dirty="0"/>
+              <a:t>Procedure</a:t>
+            </a:r>
+          </a:p>
+        </p:txBody>
+      </p:sp>
+      <p:sp>
+        <p:nvSpPr>
+          <p:cNvPr id="6" name="Content Placeholder 5">
+            <a:extLst>
+              <a:ext uri="{FF2B5EF4-FFF2-40B4-BE49-F238E27FC236}">
+                <a16:creationId xmlns:a16="http://schemas.microsoft.com/office/drawing/2014/main" id="{0B14C9E4-E27D-6C8A-FF93-80BD89128698}"/>
+              </a:ext>
+            </a:extLst>
+          </p:cNvPr>
+          <p:cNvSpPr>
+            <a:spLocks noGrp="1"/>
+          </p:cNvSpPr>
+          <p:nvPr>
+            <p:ph idx="1"/>
+          </p:nvPr>
+        </p:nvSpPr>
+        <p:spPr>
+          <a:xfrm>
+            <a:off x="372533" y="952466"/>
+            <a:ext cx="8387645" cy="5595089"/>
+          </a:xfrm>
+        </p:spPr>
+        <p:txBody>
+          <a:bodyPr/>
+          <a:lstStyle/>
+          <a:p>
+            <a:pPr marL="0" indent="0">
+              <a:buNone/>
+            </a:pPr>
+            <a:r>
+              <a:rPr lang="en-US" i="1" dirty="0">
+                <a:solidFill>
+                  <a:srgbClr val="00FF00"/>
+                </a:solidFill>
+              </a:rPr>
+              <a:t>Preparing the </a:t>
+            </a:r>
+            <a:r>
+              <a:rPr lang="en-US" i="1" dirty="0" err="1">
+                <a:solidFill>
+                  <a:srgbClr val="00FF00"/>
+                </a:solidFill>
+              </a:rPr>
+              <a:t>buret</a:t>
+            </a:r>
+            <a:endParaRPr lang="en-US" i="1" dirty="0">
+              <a:solidFill>
+                <a:srgbClr val="00FF00"/>
+              </a:solidFill>
+            </a:endParaRPr>
+          </a:p>
+          <a:p>
+            <a:pPr marL="457200" indent="-457200">
+              <a:buFont typeface="+mj-lt"/>
+              <a:buAutoNum type="arabicPeriod"/>
+            </a:pPr>
+            <a:r>
+              <a:rPr lang="en-US" dirty="0"/>
+              <a:t>Rinse the </a:t>
+            </a:r>
+            <a:r>
+              <a:rPr lang="en-US" dirty="0" err="1"/>
+              <a:t>buret</a:t>
+            </a:r>
+            <a:r>
+              <a:rPr lang="en-US" dirty="0"/>
+              <a:t> with 5 mL DI water three times (turn </a:t>
+            </a:r>
+            <a:r>
+              <a:rPr lang="en-US" dirty="0" err="1"/>
+              <a:t>buret</a:t>
+            </a:r>
+            <a:r>
+              <a:rPr lang="en-US" dirty="0"/>
+              <a:t> on side and rotate it). Collect the rinse in a large waste beaker.</a:t>
+            </a:r>
+          </a:p>
+          <a:p>
+            <a:pPr marL="457200" indent="-457200">
+              <a:buFont typeface="+mj-lt"/>
+              <a:buAutoNum type="arabicPeriod"/>
+            </a:pPr>
+            <a:r>
+              <a:rPr lang="en-US" dirty="0"/>
+              <a:t>Repeat rinsing but with 5 mL of the titrant NaOH solution</a:t>
+            </a:r>
+          </a:p>
+          <a:p>
+            <a:pPr marL="457200" indent="-457200">
+              <a:buFont typeface="+mj-lt"/>
+              <a:buAutoNum type="arabicPeriod"/>
+            </a:pPr>
+            <a:r>
+              <a:rPr lang="en-US" dirty="0"/>
+              <a:t>Clamp the </a:t>
+            </a:r>
+            <a:r>
+              <a:rPr lang="en-US" dirty="0" err="1"/>
+              <a:t>buret</a:t>
+            </a:r>
+            <a:r>
+              <a:rPr lang="en-US" dirty="0"/>
+              <a:t> to the stand and with the waste beaker under it and stopcock open, add several mL to </a:t>
+            </a:r>
+            <a:r>
+              <a:rPr lang="en-US" dirty="0" err="1"/>
+              <a:t>buret</a:t>
+            </a:r>
+            <a:r>
+              <a:rPr lang="en-US" dirty="0"/>
+              <a:t>. As it flows, close stopcock. Ensure flow has filled </a:t>
+            </a:r>
+            <a:r>
+              <a:rPr lang="en-US" dirty="0" err="1"/>
+              <a:t>buret</a:t>
+            </a:r>
+            <a:r>
+              <a:rPr lang="en-US" dirty="0"/>
+              <a:t> tip</a:t>
+            </a:r>
+          </a:p>
+        </p:txBody>
+      </p:sp>
+      <p:sp>
+        <p:nvSpPr>
+          <p:cNvPr id="3" name="Slide Number Placeholder 2">
+            <a:extLst>
+              <a:ext uri="{FF2B5EF4-FFF2-40B4-BE49-F238E27FC236}">
+                <a16:creationId xmlns:a16="http://schemas.microsoft.com/office/drawing/2014/main" id="{3D498CC2-89E7-D6FB-7BE0-905451E04B2F}"/>
+              </a:ext>
+            </a:extLst>
+          </p:cNvPr>
+          <p:cNvSpPr>
+            <a:spLocks noGrp="1"/>
+          </p:cNvSpPr>
+          <p:nvPr>
+            <p:ph type="sldNum" sz="quarter" idx="10"/>
+          </p:nvPr>
+        </p:nvSpPr>
+        <p:spPr/>
+        <p:txBody>
+          <a:bodyPr/>
+          <a:lstStyle/>
+          <a:p>
+            <a:fld id="{DA7C98CF-2420-4B97-8881-079E520414F2}" type="slidenum">
+              <a:rPr lang="en-US" smtClean="0"/>
+              <a:pPr/>
+              <a:t>10</a:t>
+            </a:fld>
+            <a:endParaRPr lang="en-US" b="1" dirty="0"/>
+          </a:p>
+        </p:txBody>
+      </p:sp>
+    </p:spTree>
+    <p:extLst>
+      <p:ext uri="{BB962C8B-B14F-4D97-AF65-F5344CB8AC3E}">
+        <p14:creationId xmlns:p14="http://schemas.microsoft.com/office/powerpoint/2010/main" val="206461902"/>
+      </p:ext>
+    </p:extLst>
+  </p:cSld>
+  <p:clrMapOvr>
+    <a:masterClrMapping/>
+  </p:clrMapOvr>
+</p:sld>
+</file>
+
+<file path=ppt/slides/slide11.xml><?xml version="1.0" encoding="utf-8"?>
+<p:sld xmlns:a="http://schemas.openxmlformats.org/drawingml/2006/main" xmlns:r="http://schemas.openxmlformats.org/officeDocument/2006/relationships" xmlns:p="http://schemas.openxmlformats.org/presentationml/2006/main">
+  <p:cSld>
+    <p:spTree>
+      <p:nvGrpSpPr>
+        <p:cNvPr id="1" name="">
+          <a:extLst>
+            <a:ext uri="{FF2B5EF4-FFF2-40B4-BE49-F238E27FC236}">
+              <a16:creationId xmlns:a16="http://schemas.microsoft.com/office/drawing/2014/main" id="{FE87709A-8175-FF7F-0231-BB8E55FD5510}"/>
+            </a:ext>
+          </a:extLst>
+        </p:cNvPr>
+        <p:cNvGrpSpPr/>
+        <p:nvPr/>
+      </p:nvGrpSpPr>
+      <p:grpSpPr>
+        <a:xfrm>
+          <a:off x="0" y="0"/>
+          <a:ext cx="0" cy="0"/>
+          <a:chOff x="0" y="0"/>
+          <a:chExt cx="0" cy="0"/>
+        </a:xfrm>
+      </p:grpSpPr>
+      <p:sp>
+        <p:nvSpPr>
+          <p:cNvPr id="2" name="Title 1">
+            <a:extLst>
+              <a:ext uri="{FF2B5EF4-FFF2-40B4-BE49-F238E27FC236}">
+                <a16:creationId xmlns:a16="http://schemas.microsoft.com/office/drawing/2014/main" id="{AC077271-3009-4152-9A13-701D524303F5}"/>
+              </a:ext>
+            </a:extLst>
+          </p:cNvPr>
+          <p:cNvSpPr>
+            <a:spLocks noGrp="1"/>
+          </p:cNvSpPr>
+          <p:nvPr>
+            <p:ph type="title"/>
+          </p:nvPr>
+        </p:nvSpPr>
+        <p:spPr>
+          <a:xfrm>
+            <a:off x="338666" y="183025"/>
+            <a:ext cx="8421512" cy="769441"/>
+          </a:xfrm>
+        </p:spPr>
+        <p:txBody>
+          <a:bodyPr/>
+          <a:lstStyle/>
+          <a:p>
+            <a:r>
+              <a:rPr lang="en-US" sz="4400" dirty="0"/>
+              <a:t>Procedure</a:t>
+            </a:r>
+          </a:p>
+        </p:txBody>
+      </p:sp>
+      <p:sp>
+        <p:nvSpPr>
+          <p:cNvPr id="6" name="Content Placeholder 5">
+            <a:extLst>
+              <a:ext uri="{FF2B5EF4-FFF2-40B4-BE49-F238E27FC236}">
+                <a16:creationId xmlns:a16="http://schemas.microsoft.com/office/drawing/2014/main" id="{407D3CAC-588F-B250-8F8D-44662EA2D80D}"/>
+              </a:ext>
+            </a:extLst>
+          </p:cNvPr>
+          <p:cNvSpPr>
+            <a:spLocks noGrp="1"/>
+          </p:cNvSpPr>
+          <p:nvPr>
+            <p:ph idx="1"/>
+          </p:nvPr>
+        </p:nvSpPr>
+        <p:spPr>
+          <a:xfrm>
+            <a:off x="372533" y="952466"/>
+            <a:ext cx="8387645" cy="5595089"/>
+          </a:xfrm>
+        </p:spPr>
+        <p:txBody>
+          <a:bodyPr/>
+          <a:lstStyle/>
+          <a:p>
+            <a:pPr marL="0" indent="0">
+              <a:buNone/>
+            </a:pPr>
+            <a:r>
+              <a:rPr lang="en-US" i="1" dirty="0">
+                <a:solidFill>
+                  <a:srgbClr val="00FF00"/>
+                </a:solidFill>
+              </a:rPr>
+              <a:t>Part I-Standardization</a:t>
+            </a:r>
+          </a:p>
+          <a:p>
+            <a:pPr marL="457200" indent="-457200">
+              <a:buFont typeface="+mj-lt"/>
+              <a:buAutoNum type="arabicPeriod" startAt="4"/>
+            </a:pPr>
+            <a:r>
+              <a:rPr lang="en-US" dirty="0"/>
+              <a:t>Fill </a:t>
+            </a:r>
+            <a:r>
+              <a:rPr lang="en-US" dirty="0" err="1"/>
+              <a:t>buret</a:t>
+            </a:r>
+            <a:r>
+              <a:rPr lang="en-US" dirty="0"/>
+              <a:t> with ~0.1 M NaOH titrant between the 0 and 3 mL mark</a:t>
+            </a:r>
+          </a:p>
+          <a:p>
+            <a:pPr marL="457200" indent="-457200">
+              <a:buFont typeface="+mj-lt"/>
+              <a:buAutoNum type="arabicPeriod" startAt="4"/>
+            </a:pPr>
+            <a:r>
+              <a:rPr lang="en-US" dirty="0"/>
+              <a:t>Record initial </a:t>
+            </a:r>
+            <a:r>
+              <a:rPr lang="en-US" dirty="0" err="1"/>
+              <a:t>buret</a:t>
+            </a:r>
+            <a:r>
+              <a:rPr lang="en-US" dirty="0"/>
+              <a:t> reading to correct precision: if the smallest division mark is 0.1 mL, then the precision should be ±0.01 mL</a:t>
+            </a:r>
+          </a:p>
+          <a:p>
+            <a:pPr marL="457200" indent="-457200">
+              <a:buFont typeface="+mj-lt"/>
+              <a:buAutoNum type="arabicPeriod" startAt="4"/>
+            </a:pPr>
+            <a:r>
+              <a:rPr lang="en-US" dirty="0"/>
+              <a:t>Oxalic acid</a:t>
+            </a:r>
+          </a:p>
+          <a:p>
+            <a:pPr marL="693738" lvl="1" indent="-457200">
+              <a:buFont typeface="+mj-lt"/>
+              <a:buAutoNum type="alphaLcParenR"/>
+            </a:pPr>
+            <a:r>
+              <a:rPr lang="en-US" dirty="0"/>
+              <a:t>Put glassine weigh paper on balance and tare (zero)</a:t>
+            </a:r>
+          </a:p>
+          <a:p>
+            <a:pPr marL="693738" lvl="1" indent="-457200">
+              <a:buFont typeface="+mj-lt"/>
+              <a:buAutoNum type="alphaLcParenR"/>
+            </a:pPr>
+            <a:r>
+              <a:rPr lang="en-US" dirty="0"/>
+              <a:t>Spoon out between 0.1000 and 0.1200 g oxalic acid dihydrate and record mass</a:t>
+            </a:r>
+          </a:p>
+          <a:p>
+            <a:pPr marL="693738" lvl="1" indent="-457200">
+              <a:buFont typeface="+mj-lt"/>
+              <a:buAutoNum type="alphaLcParenR"/>
+            </a:pPr>
+            <a:r>
+              <a:rPr lang="en-US" dirty="0"/>
+              <a:t>Transfer the acid completely without spilling into flask</a:t>
+            </a:r>
+          </a:p>
+          <a:p>
+            <a:pPr marL="457200" indent="-457200">
+              <a:buFont typeface="+mj-lt"/>
+              <a:buAutoNum type="arabicPeriod" startAt="4"/>
+            </a:pPr>
+            <a:r>
+              <a:rPr lang="en-US" dirty="0"/>
+              <a:t>Add about 10 mL DI-water in 10 mL graduated cylinder to the flask with acid, swirl to dissolve</a:t>
+            </a:r>
+          </a:p>
+          <a:p>
+            <a:pPr marL="457200" indent="-457200">
+              <a:buFont typeface="+mj-lt"/>
+              <a:buAutoNum type="arabicPeriod" startAt="4"/>
+            </a:pPr>
+            <a:r>
+              <a:rPr lang="en-US" dirty="0"/>
+              <a:t>Add 2-3 drops phenolphthalein to flask</a:t>
+            </a:r>
+          </a:p>
+        </p:txBody>
+      </p:sp>
+      <p:sp>
+        <p:nvSpPr>
+          <p:cNvPr id="3" name="Slide Number Placeholder 2">
+            <a:extLst>
+              <a:ext uri="{FF2B5EF4-FFF2-40B4-BE49-F238E27FC236}">
+                <a16:creationId xmlns:a16="http://schemas.microsoft.com/office/drawing/2014/main" id="{C8F060B3-CD3D-EFFA-A5E8-FF7F485DA4C7}"/>
+              </a:ext>
+            </a:extLst>
+          </p:cNvPr>
+          <p:cNvSpPr>
+            <a:spLocks noGrp="1"/>
+          </p:cNvSpPr>
+          <p:nvPr>
+            <p:ph type="sldNum" sz="quarter" idx="10"/>
+          </p:nvPr>
+        </p:nvSpPr>
+        <p:spPr/>
+        <p:txBody>
+          <a:bodyPr/>
+          <a:lstStyle/>
+          <a:p>
+            <a:fld id="{DA7C98CF-2420-4B97-8881-079E520414F2}" type="slidenum">
+              <a:rPr lang="en-US" smtClean="0"/>
+              <a:pPr/>
+              <a:t>11</a:t>
+            </a:fld>
+            <a:endParaRPr lang="en-US" b="1" dirty="0"/>
+          </a:p>
+        </p:txBody>
+      </p:sp>
+    </p:spTree>
+    <p:extLst>
+      <p:ext uri="{BB962C8B-B14F-4D97-AF65-F5344CB8AC3E}">
+        <p14:creationId xmlns:p14="http://schemas.microsoft.com/office/powerpoint/2010/main" val="2345466595"/>
+      </p:ext>
+    </p:extLst>
+  </p:cSld>
+  <p:clrMapOvr>
+    <a:masterClrMapping/>
+  </p:clrMapOvr>
+</p:sld>
+</file>
+
+<file path=ppt/slides/slide12.xml><?xml version="1.0" encoding="utf-8"?>
+<p:sld xmlns:a="http://schemas.openxmlformats.org/drawingml/2006/main" xmlns:r="http://schemas.openxmlformats.org/officeDocument/2006/relationships" xmlns:p="http://schemas.openxmlformats.org/presentationml/2006/main">
+  <p:cSld>
+    <p:spTree>
+      <p:nvGrpSpPr>
+        <p:cNvPr id="1" name="">
+          <a:extLst>
+            <a:ext uri="{FF2B5EF4-FFF2-40B4-BE49-F238E27FC236}">
+              <a16:creationId xmlns:a16="http://schemas.microsoft.com/office/drawing/2014/main" id="{A45982F0-6FEF-1DD5-8F88-C3CA74DD97C4}"/>
+            </a:ext>
+          </a:extLst>
+        </p:cNvPr>
+        <p:cNvGrpSpPr/>
+        <p:nvPr/>
+      </p:nvGrpSpPr>
+      <p:grpSpPr>
+        <a:xfrm>
+          <a:off x="0" y="0"/>
+          <a:ext cx="0" cy="0"/>
+          <a:chOff x="0" y="0"/>
+          <a:chExt cx="0" cy="0"/>
+        </a:xfrm>
+      </p:grpSpPr>
+      <p:sp>
+        <p:nvSpPr>
+          <p:cNvPr id="2" name="Title 1">
+            <a:extLst>
+              <a:ext uri="{FF2B5EF4-FFF2-40B4-BE49-F238E27FC236}">
+                <a16:creationId xmlns:a16="http://schemas.microsoft.com/office/drawing/2014/main" id="{B6123A48-8261-7B51-CD72-8E2B8E465E2D}"/>
+              </a:ext>
+            </a:extLst>
+          </p:cNvPr>
+          <p:cNvSpPr>
+            <a:spLocks noGrp="1"/>
+          </p:cNvSpPr>
+          <p:nvPr>
+            <p:ph type="title"/>
+          </p:nvPr>
+        </p:nvSpPr>
+        <p:spPr>
+          <a:xfrm>
+            <a:off x="338666" y="183025"/>
+            <a:ext cx="8421512" cy="769441"/>
+          </a:xfrm>
+        </p:spPr>
+        <p:txBody>
+          <a:bodyPr/>
+          <a:lstStyle/>
+          <a:p>
+            <a:r>
+              <a:rPr lang="en-US" sz="4400" dirty="0"/>
+              <a:t>Procedure</a:t>
+            </a:r>
+          </a:p>
+        </p:txBody>
+      </p:sp>
+      <p:sp>
+        <p:nvSpPr>
+          <p:cNvPr id="6" name="Content Placeholder 5">
+            <a:extLst>
+              <a:ext uri="{FF2B5EF4-FFF2-40B4-BE49-F238E27FC236}">
+                <a16:creationId xmlns:a16="http://schemas.microsoft.com/office/drawing/2014/main" id="{A67DC92C-FB76-2CC9-FEBE-8BF998CE76C3}"/>
+              </a:ext>
+            </a:extLst>
+          </p:cNvPr>
+          <p:cNvSpPr>
+            <a:spLocks noGrp="1"/>
+          </p:cNvSpPr>
+          <p:nvPr>
+            <p:ph idx="1"/>
+          </p:nvPr>
+        </p:nvSpPr>
+        <p:spPr>
+          <a:xfrm>
+            <a:off x="372533" y="952466"/>
+            <a:ext cx="8387645" cy="5595089"/>
+          </a:xfrm>
+        </p:spPr>
+        <p:txBody>
+          <a:bodyPr/>
+          <a:lstStyle/>
+          <a:p>
+            <a:pPr marL="0" indent="0">
+              <a:buNone/>
+            </a:pPr>
+            <a:r>
+              <a:rPr lang="en-US" i="1" dirty="0">
+                <a:solidFill>
+                  <a:srgbClr val="00FF00"/>
+                </a:solidFill>
+              </a:rPr>
+              <a:t>Part I-Standardization</a:t>
+            </a:r>
+          </a:p>
+          <a:p>
+            <a:pPr marL="457200" indent="-457200">
+              <a:buFont typeface="+mj-lt"/>
+              <a:buAutoNum type="arabicPeriod" startAt="9"/>
+            </a:pPr>
+            <a:r>
+              <a:rPr lang="en-US" dirty="0"/>
+              <a:t>Place piece of white paper under flask to observe any color change</a:t>
+            </a:r>
+          </a:p>
+          <a:p>
+            <a:pPr marL="457200" indent="-457200">
+              <a:buFont typeface="+mj-lt"/>
+              <a:buAutoNum type="arabicPeriod" startAt="9"/>
+            </a:pPr>
+            <a:r>
+              <a:rPr lang="en-US" dirty="0"/>
+              <a:t> Swirl flask and quickly add 10 mL NaOH from </a:t>
+            </a:r>
+            <a:r>
+              <a:rPr lang="en-US" dirty="0" err="1"/>
+              <a:t>buret</a:t>
+            </a:r>
+            <a:endParaRPr lang="en-US" dirty="0"/>
+          </a:p>
+          <a:p>
+            <a:pPr marL="457200" indent="-457200">
+              <a:buFont typeface="+mj-lt"/>
+              <a:buAutoNum type="arabicPeriod" startAt="9"/>
+            </a:pPr>
+            <a:r>
+              <a:rPr lang="en-US" dirty="0"/>
+              <a:t> Drop-by-drop titration</a:t>
+            </a:r>
+          </a:p>
+          <a:p>
+            <a:pPr marL="693738" lvl="1" indent="-457200">
+              <a:buFont typeface="+mj-lt"/>
+              <a:buAutoNum type="alphaLcParenR"/>
+            </a:pPr>
+            <a:r>
+              <a:rPr lang="en-US" dirty="0"/>
+              <a:t>The stopcock will be turned only to permit drop by drop addition of NaOH. Turn the stopcock on and off in controlled manner to dispense drops as necessary. As flask is swirled with each drop, look for pink color to appear. With each drop, the color may disappear more slowly. As the endpoint is reached, a very faint pink color will persist in solution.</a:t>
+            </a:r>
+          </a:p>
+          <a:p>
+            <a:pPr marL="693738" lvl="1" indent="-457200">
+              <a:buFont typeface="+mj-lt"/>
+              <a:buAutoNum type="alphaLcParenR"/>
+            </a:pPr>
+            <a:r>
+              <a:rPr lang="en-US" dirty="0"/>
+              <a:t>The best control is to quickly rotate stopcock by 180°, or to form a tiny drop in the tip, and touch tip to inside of flask wall</a:t>
+            </a:r>
+          </a:p>
+        </p:txBody>
+      </p:sp>
+      <p:sp>
+        <p:nvSpPr>
+          <p:cNvPr id="3" name="Slide Number Placeholder 2">
+            <a:extLst>
+              <a:ext uri="{FF2B5EF4-FFF2-40B4-BE49-F238E27FC236}">
+                <a16:creationId xmlns:a16="http://schemas.microsoft.com/office/drawing/2014/main" id="{1CE54C3D-8EB4-BA73-5BC6-32FD97B3EC77}"/>
+              </a:ext>
+            </a:extLst>
+          </p:cNvPr>
+          <p:cNvSpPr>
+            <a:spLocks noGrp="1"/>
+          </p:cNvSpPr>
+          <p:nvPr>
+            <p:ph type="sldNum" sz="quarter" idx="10"/>
+          </p:nvPr>
+        </p:nvSpPr>
+        <p:spPr/>
+        <p:txBody>
+          <a:bodyPr/>
+          <a:lstStyle/>
+          <a:p>
+            <a:fld id="{DA7C98CF-2420-4B97-8881-079E520414F2}" type="slidenum">
+              <a:rPr lang="en-US" smtClean="0"/>
+              <a:pPr/>
+              <a:t>12</a:t>
+            </a:fld>
+            <a:endParaRPr lang="en-US" b="1" dirty="0"/>
+          </a:p>
+        </p:txBody>
+      </p:sp>
+    </p:spTree>
+    <p:extLst>
+      <p:ext uri="{BB962C8B-B14F-4D97-AF65-F5344CB8AC3E}">
+        <p14:creationId xmlns:p14="http://schemas.microsoft.com/office/powerpoint/2010/main" val="3378126116"/>
+      </p:ext>
+    </p:extLst>
+  </p:cSld>
+  <p:clrMapOvr>
+    <a:masterClrMapping/>
+  </p:clrMapOvr>
+</p:sld>
+</file>
+
+<file path=ppt/slides/slide13.xml><?xml version="1.0" encoding="utf-8"?>
+<p:sld xmlns:a="http://schemas.openxmlformats.org/drawingml/2006/main" xmlns:r="http://schemas.openxmlformats.org/officeDocument/2006/relationships" xmlns:p="http://schemas.openxmlformats.org/presentationml/2006/main">
+  <p:cSld>
+    <p:spTree>
+      <p:nvGrpSpPr>
+        <p:cNvPr id="1" name="">
+          <a:extLst>
+            <a:ext uri="{FF2B5EF4-FFF2-40B4-BE49-F238E27FC236}">
               <a16:creationId xmlns:a16="http://schemas.microsoft.com/office/drawing/2014/main" id="{E8D80D32-0346-D500-B15B-E1E54834AE81}"/>
             </a:ext>
           </a:extLst>
@@ -10444,6 +11185,36 @@
           </a:p>
         </p:txBody>
       </p:sp>
+      <p:sp>
+        <p:nvSpPr>
+          <p:cNvPr id="3" name="Slide Number Placeholder 2">
+            <a:extLst>
+              <a:ext uri="{FF2B5EF4-FFF2-40B4-BE49-F238E27FC236}">
+                <a16:creationId xmlns:a16="http://schemas.microsoft.com/office/drawing/2014/main" id="{B19CFC1D-9032-0C25-856D-7323D7323367}"/>
+              </a:ext>
+            </a:extLst>
+          </p:cNvPr>
+          <p:cNvSpPr>
+            <a:spLocks noGrp="1"/>
+          </p:cNvSpPr>
+          <p:nvPr>
+            <p:ph type="sldNum" sz="quarter" idx="10"/>
+          </p:nvPr>
+        </p:nvSpPr>
+        <p:spPr/>
+        <p:txBody>
+          <a:bodyPr/>
+          <a:lstStyle/>
+          <a:p>
+            <a:fld id="{DA7C98CF-2420-4B97-8881-079E520414F2}" type="slidenum">
+              <a:rPr lang="en-US" smtClean="0"/>
+              <a:pPr/>
+              <a:t>13</a:t>
+            </a:fld>
+            <a:endParaRPr lang="en-US" b="1" dirty="0"/>
+          </a:p>
+        </p:txBody>
+      </p:sp>
     </p:spTree>
     <p:extLst>
       <p:ext uri="{BB962C8B-B14F-4D97-AF65-F5344CB8AC3E}">
@@ -10457,7 +11228,7 @@
 </p:sld>
 </file>
 
-<file path=ppt/slides/slide11.xml><?xml version="1.0" encoding="utf-8"?>
+<file path=ppt/slides/slide14.xml><?xml version="1.0" encoding="utf-8"?>
 <p:sld xmlns:a="http://schemas.openxmlformats.org/drawingml/2006/main" xmlns:r="http://schemas.openxmlformats.org/officeDocument/2006/relationships" xmlns:p="http://schemas.openxmlformats.org/presentationml/2006/main">
   <p:cSld>
     <p:spTree>
@@ -10639,6 +11410,36 @@
           </a:p>
         </p:txBody>
       </p:sp>
+      <p:sp>
+        <p:nvSpPr>
+          <p:cNvPr id="3" name="Slide Number Placeholder 2">
+            <a:extLst>
+              <a:ext uri="{FF2B5EF4-FFF2-40B4-BE49-F238E27FC236}">
+                <a16:creationId xmlns:a16="http://schemas.microsoft.com/office/drawing/2014/main" id="{833D0EDD-A6E2-1411-DA05-D62A5F57044F}"/>
+              </a:ext>
+            </a:extLst>
+          </p:cNvPr>
+          <p:cNvSpPr>
+            <a:spLocks noGrp="1"/>
+          </p:cNvSpPr>
+          <p:nvPr>
+            <p:ph type="sldNum" sz="quarter" idx="10"/>
+          </p:nvPr>
+        </p:nvSpPr>
+        <p:spPr/>
+        <p:txBody>
+          <a:bodyPr/>
+          <a:lstStyle/>
+          <a:p>
+            <a:fld id="{DA7C98CF-2420-4B97-8881-079E520414F2}" type="slidenum">
+              <a:rPr lang="en-US" smtClean="0"/>
+              <a:pPr/>
+              <a:t>14</a:t>
+            </a:fld>
+            <a:endParaRPr lang="en-US" b="1" dirty="0"/>
+          </a:p>
+        </p:txBody>
+      </p:sp>
     </p:spTree>
     <p:extLst>
       <p:ext uri="{BB962C8B-B14F-4D97-AF65-F5344CB8AC3E}">
@@ -10652,7 +11453,134 @@
 </p:sld>
 </file>
 
-<file path=ppt/slides/slide12.xml><?xml version="1.0" encoding="utf-8"?>
+<file path=ppt/slides/slide15.xml><?xml version="1.0" encoding="utf-8"?>
+<p:sld xmlns:a="http://schemas.openxmlformats.org/drawingml/2006/main" xmlns:r="http://schemas.openxmlformats.org/officeDocument/2006/relationships" xmlns:p="http://schemas.openxmlformats.org/presentationml/2006/main">
+  <p:cSld>
+    <p:spTree>
+      <p:nvGrpSpPr>
+        <p:cNvPr id="1" name=""/>
+        <p:cNvGrpSpPr/>
+        <p:nvPr/>
+      </p:nvGrpSpPr>
+      <p:grpSpPr>
+        <a:xfrm>
+          <a:off x="0" y="0"/>
+          <a:ext cx="0" cy="0"/>
+          <a:chOff x="0" y="0"/>
+          <a:chExt cx="0" cy="0"/>
+        </a:xfrm>
+      </p:grpSpPr>
+      <p:sp>
+        <p:nvSpPr>
+          <p:cNvPr id="2" name="Title 1">
+            <a:extLst>
+              <a:ext uri="{FF2B5EF4-FFF2-40B4-BE49-F238E27FC236}">
+                <a16:creationId xmlns:a16="http://schemas.microsoft.com/office/drawing/2014/main" id="{4E7C79B0-B384-1533-BACA-0EA95D4089F9}"/>
+              </a:ext>
+            </a:extLst>
+          </p:cNvPr>
+          <p:cNvSpPr>
+            <a:spLocks noGrp="1"/>
+          </p:cNvSpPr>
+          <p:nvPr>
+            <p:ph type="title"/>
+          </p:nvPr>
+        </p:nvSpPr>
+        <p:spPr/>
+        <p:txBody>
+          <a:bodyPr/>
+          <a:lstStyle/>
+          <a:p>
+            <a:r>
+              <a:rPr lang="en-US" dirty="0"/>
+              <a:t>Clean Up</a:t>
+            </a:r>
+          </a:p>
+        </p:txBody>
+      </p:sp>
+      <p:sp>
+        <p:nvSpPr>
+          <p:cNvPr id="3" name="Content Placeholder 2">
+            <a:extLst>
+              <a:ext uri="{FF2B5EF4-FFF2-40B4-BE49-F238E27FC236}">
+                <a16:creationId xmlns:a16="http://schemas.microsoft.com/office/drawing/2014/main" id="{F122473B-F6C9-7A59-3DAB-7CBF32F68EB5}"/>
+              </a:ext>
+            </a:extLst>
+          </p:cNvPr>
+          <p:cNvSpPr>
+            <a:spLocks noGrp="1"/>
+          </p:cNvSpPr>
+          <p:nvPr>
+            <p:ph idx="1"/>
+          </p:nvPr>
+        </p:nvSpPr>
+        <p:spPr/>
+        <p:txBody>
+          <a:bodyPr/>
+          <a:lstStyle/>
+          <a:p>
+            <a:r>
+              <a:rPr lang="en-US" dirty="0"/>
+              <a:t>Pour waste solutions in the aqueous solution carboy located in the fume hood (</a:t>
+            </a:r>
+            <a:r>
+              <a:rPr lang="en-US"/>
+              <a:t>usually placed near door)</a:t>
+            </a:r>
+            <a:endParaRPr lang="en-US" dirty="0"/>
+          </a:p>
+          <a:p>
+            <a:r>
+              <a:rPr lang="en-US" dirty="0"/>
+              <a:t>Clean up other equipment as done previously in the lab</a:t>
+            </a:r>
+          </a:p>
+        </p:txBody>
+      </p:sp>
+      <p:sp>
+        <p:nvSpPr>
+          <p:cNvPr id="4" name="Slide Number Placeholder 3">
+            <a:extLst>
+              <a:ext uri="{FF2B5EF4-FFF2-40B4-BE49-F238E27FC236}">
+                <a16:creationId xmlns:a16="http://schemas.microsoft.com/office/drawing/2014/main" id="{5F041E73-C2A1-B001-43E7-9350F487271A}"/>
+              </a:ext>
+            </a:extLst>
+          </p:cNvPr>
+          <p:cNvSpPr>
+            <a:spLocks noGrp="1"/>
+          </p:cNvSpPr>
+          <p:nvPr>
+            <p:ph type="sldNum" sz="quarter" idx="10"/>
+          </p:nvPr>
+        </p:nvSpPr>
+        <p:spPr/>
+        <p:txBody>
+          <a:bodyPr/>
+          <a:lstStyle/>
+          <a:p>
+            <a:fld id="{DA7C98CF-2420-4B97-8881-079E520414F2}" type="slidenum">
+              <a:rPr lang="en-US" smtClean="0"/>
+              <a:pPr/>
+              <a:t>15</a:t>
+            </a:fld>
+            <a:endParaRPr lang="en-US" b="1" dirty="0"/>
+          </a:p>
+        </p:txBody>
+      </p:sp>
+    </p:spTree>
+    <p:extLst>
+      <p:ext uri="{BB962C8B-B14F-4D97-AF65-F5344CB8AC3E}">
+        <p14:creationId xmlns:p14="http://schemas.microsoft.com/office/powerpoint/2010/main" val="3469914632"/>
+      </p:ext>
+    </p:extLst>
+  </p:cSld>
+  <p:clrMapOvr>
+    <a:masterClrMapping/>
+  </p:clrMapOvr>
+</p:sld>
+</file>
+
+<file path=ppt/slides/slide16.xml><?xml version="1.0" encoding="utf-8"?>
 <p:sld xmlns:a="http://schemas.openxmlformats.org/drawingml/2006/main" xmlns:r="http://schemas.openxmlformats.org/officeDocument/2006/relationships" xmlns:p="http://schemas.openxmlformats.org/presentationml/2006/main">
   <p:cSld>
     <p:spTree>
@@ -10818,6 +11746,36 @@
           </a:p>
         </p:txBody>
       </p:sp>
+      <p:sp>
+        <p:nvSpPr>
+          <p:cNvPr id="3" name="Slide Number Placeholder 2">
+            <a:extLst>
+              <a:ext uri="{FF2B5EF4-FFF2-40B4-BE49-F238E27FC236}">
+                <a16:creationId xmlns:a16="http://schemas.microsoft.com/office/drawing/2014/main" id="{BAAD5BA0-084B-609E-3A70-D21DE77A8FA7}"/>
+              </a:ext>
+            </a:extLst>
+          </p:cNvPr>
+          <p:cNvSpPr>
+            <a:spLocks noGrp="1"/>
+          </p:cNvSpPr>
+          <p:nvPr>
+            <p:ph type="sldNum" sz="quarter" idx="10"/>
+          </p:nvPr>
+        </p:nvSpPr>
+        <p:spPr/>
+        <p:txBody>
+          <a:bodyPr/>
+          <a:lstStyle/>
+          <a:p>
+            <a:fld id="{DA7C98CF-2420-4B97-8881-079E520414F2}" type="slidenum">
+              <a:rPr lang="en-US" smtClean="0"/>
+              <a:pPr/>
+              <a:t>16</a:t>
+            </a:fld>
+            <a:endParaRPr lang="en-US" b="1" dirty="0"/>
+          </a:p>
+        </p:txBody>
+      </p:sp>
     </p:spTree>
     <p:extLst>
       <p:ext uri="{BB962C8B-B14F-4D97-AF65-F5344CB8AC3E}">
@@ -10831,7 +11789,7 @@
 </p:sld>
 </file>
 
-<file path=ppt/slides/slide13.xml><?xml version="1.0" encoding="utf-8"?>
+<file path=ppt/slides/slide17.xml><?xml version="1.0" encoding="utf-8"?>
 <p:sld xmlns:a="http://schemas.openxmlformats.org/drawingml/2006/main" xmlns:r="http://schemas.openxmlformats.org/officeDocument/2006/relationships" xmlns:p="http://schemas.openxmlformats.org/presentationml/2006/main">
   <p:cSld>
     <p:spTree>
@@ -10919,6 +11877,36 @@
           </a:prstGeom>
         </p:spPr>
       </p:pic>
+      <p:sp>
+        <p:nvSpPr>
+          <p:cNvPr id="3" name="Slide Number Placeholder 2">
+            <a:extLst>
+              <a:ext uri="{FF2B5EF4-FFF2-40B4-BE49-F238E27FC236}">
+                <a16:creationId xmlns:a16="http://schemas.microsoft.com/office/drawing/2014/main" id="{D0F4B93F-E05A-3B06-9EB7-E85F8C5BF93E}"/>
+              </a:ext>
+            </a:extLst>
+          </p:cNvPr>
+          <p:cNvSpPr>
+            <a:spLocks noGrp="1"/>
+          </p:cNvSpPr>
+          <p:nvPr>
+            <p:ph type="sldNum" sz="quarter" idx="10"/>
+          </p:nvPr>
+        </p:nvSpPr>
+        <p:spPr/>
+        <p:txBody>
+          <a:bodyPr/>
+          <a:lstStyle/>
+          <a:p>
+            <a:fld id="{DA7C98CF-2420-4B97-8881-079E520414F2}" type="slidenum">
+              <a:rPr lang="en-US" smtClean="0"/>
+              <a:pPr/>
+              <a:t>17</a:t>
+            </a:fld>
+            <a:endParaRPr lang="en-US" b="1" dirty="0"/>
+          </a:p>
+        </p:txBody>
+      </p:sp>
     </p:spTree>
     <p:extLst>
       <p:ext uri="{BB962C8B-B14F-4D97-AF65-F5344CB8AC3E}">
@@ -10932,7 +11920,7 @@
 </p:sld>
 </file>
 
-<file path=ppt/slides/slide14.xml><?xml version="1.0" encoding="utf-8"?>
+<file path=ppt/slides/slide18.xml><?xml version="1.0" encoding="utf-8"?>
 <p:sld xmlns:a="http://schemas.openxmlformats.org/drawingml/2006/main" xmlns:r="http://schemas.openxmlformats.org/officeDocument/2006/relationships" xmlns:p="http://schemas.openxmlformats.org/presentationml/2006/main">
   <p:cSld>
     <p:spTree>
@@ -11020,6 +12008,36 @@
           </a:prstGeom>
         </p:spPr>
       </p:pic>
+      <p:sp>
+        <p:nvSpPr>
+          <p:cNvPr id="3" name="Slide Number Placeholder 2">
+            <a:extLst>
+              <a:ext uri="{FF2B5EF4-FFF2-40B4-BE49-F238E27FC236}">
+                <a16:creationId xmlns:a16="http://schemas.microsoft.com/office/drawing/2014/main" id="{538CE6F9-C03E-43BF-0573-BBD5E1B68FAC}"/>
+              </a:ext>
+            </a:extLst>
+          </p:cNvPr>
+          <p:cNvSpPr>
+            <a:spLocks noGrp="1"/>
+          </p:cNvSpPr>
+          <p:nvPr>
+            <p:ph type="sldNum" sz="quarter" idx="10"/>
+          </p:nvPr>
+        </p:nvSpPr>
+        <p:spPr/>
+        <p:txBody>
+          <a:bodyPr/>
+          <a:lstStyle/>
+          <a:p>
+            <a:fld id="{DA7C98CF-2420-4B97-8881-079E520414F2}" type="slidenum">
+              <a:rPr lang="en-US" smtClean="0"/>
+              <a:pPr/>
+              <a:t>18</a:t>
+            </a:fld>
+            <a:endParaRPr lang="en-US" b="1" dirty="0"/>
+          </a:p>
+        </p:txBody>
+      </p:sp>
     </p:spTree>
     <p:extLst>
       <p:ext uri="{BB962C8B-B14F-4D97-AF65-F5344CB8AC3E}">
@@ -11033,7 +12051,7 @@
 </p:sld>
 </file>
 
-<file path=ppt/slides/slide15.xml><?xml version="1.0" encoding="utf-8"?>
+<file path=ppt/slides/slide19.xml><?xml version="1.0" encoding="utf-8"?>
 <p:sld xmlns:a="http://schemas.openxmlformats.org/drawingml/2006/main" xmlns:r="http://schemas.openxmlformats.org/officeDocument/2006/relationships" xmlns:p="http://schemas.openxmlformats.org/presentationml/2006/main">
   <p:cSld>
     <p:spTree>
@@ -11074,13 +12092,13 @@
         </p:nvSpPr>
         <p:spPr>
           <a:xfrm>
-            <a:off x="361244" y="228876"/>
-            <a:ext cx="8421512" cy="830997"/>
+            <a:off x="309205" y="1002027"/>
+            <a:ext cx="2939517" cy="830997"/>
           </a:xfrm>
         </p:spPr>
         <p:txBody>
           <a:bodyPr wrap="square" anchor="ctr">
-            <a:normAutofit/>
+            <a:normAutofit fontScale="90000"/>
           </a:bodyPr>
           <a:lstStyle/>
           <a:p>
@@ -11088,15 +12106,45 @@
               <a:rPr lang="en-US" dirty="0"/>
               <a:t>Example Data Analysis</a:t>
             </a:r>
+          </a:p>
+        </p:txBody>
+      </p:sp>
+      <p:sp>
+        <p:nvSpPr>
+          <p:cNvPr id="3" name="Slide Number Placeholder 2">
+            <a:extLst>
+              <a:ext uri="{FF2B5EF4-FFF2-40B4-BE49-F238E27FC236}">
+                <a16:creationId xmlns:a16="http://schemas.microsoft.com/office/drawing/2014/main" id="{49D673F8-6606-E3AC-C336-FA7AD60984E8}"/>
+              </a:ext>
+            </a:extLst>
+          </p:cNvPr>
+          <p:cNvSpPr>
+            <a:spLocks noGrp="1"/>
+          </p:cNvSpPr>
+          <p:nvPr>
+            <p:ph type="sldNum" sz="quarter" idx="10"/>
+          </p:nvPr>
+        </p:nvSpPr>
+        <p:spPr/>
+        <p:txBody>
+          <a:bodyPr/>
+          <a:lstStyle/>
+          <a:p>
+            <a:fld id="{DA7C98CF-2420-4B97-8881-079E520414F2}" type="slidenum">
+              <a:rPr lang="en-US" smtClean="0"/>
+              <a:pPr/>
+              <a:t>19</a:t>
+            </a:fld>
+            <a:endParaRPr lang="en-US" b="1" dirty="0"/>
           </a:p>
         </p:txBody>
       </p:sp>
       <p:pic>
         <p:nvPicPr>
-          <p:cNvPr id="4" name="Picture 3">
+          <p:cNvPr id="6" name="Picture 5">
             <a:extLst>
               <a:ext uri="{FF2B5EF4-FFF2-40B4-BE49-F238E27FC236}">
-                <a16:creationId xmlns:a16="http://schemas.microsoft.com/office/drawing/2014/main" id="{ED865633-15DA-6EB4-C70D-6BDC4EBB3B2F}"/>
+                <a16:creationId xmlns:a16="http://schemas.microsoft.com/office/drawing/2014/main" id="{A920DD02-90D4-0BB6-DFA6-BB76933B8B06}"/>
               </a:ext>
             </a:extLst>
           </p:cNvPr>
@@ -11113,8 +12161,8 @@
         </p:blipFill>
         <p:spPr>
           <a:xfrm>
-            <a:off x="1745561" y="964202"/>
-            <a:ext cx="5267357" cy="5781984"/>
+            <a:off x="2746513" y="1403"/>
+            <a:ext cx="6017804" cy="6611667"/>
           </a:xfrm>
           <a:prstGeom prst="rect">
             <a:avLst/>
@@ -11134,7 +12182,154 @@
 </p:sld>
 </file>
 
-<file path=ppt/slides/slide16.xml><?xml version="1.0" encoding="utf-8"?>
+<file path=ppt/slides/slide2.xml><?xml version="1.0" encoding="utf-8"?>
+<p:sld xmlns:a="http://schemas.openxmlformats.org/drawingml/2006/main" xmlns:r="http://schemas.openxmlformats.org/officeDocument/2006/relationships" xmlns:p="http://schemas.openxmlformats.org/presentationml/2006/main">
+  <p:cSld>
+    <p:spTree>
+      <p:nvGrpSpPr>
+        <p:cNvPr id="1" name="">
+          <a:extLst>
+            <a:ext uri="{FF2B5EF4-FFF2-40B4-BE49-F238E27FC236}">
+              <a16:creationId xmlns:a16="http://schemas.microsoft.com/office/drawing/2014/main" id="{5B70CA0B-425C-F9D0-E280-9F0757ED9218}"/>
+            </a:ext>
+          </a:extLst>
+        </p:cNvPr>
+        <p:cNvGrpSpPr/>
+        <p:nvPr/>
+      </p:nvGrpSpPr>
+      <p:grpSpPr>
+        <a:xfrm>
+          <a:off x="0" y="0"/>
+          <a:ext cx="0" cy="0"/>
+          <a:chOff x="0" y="0"/>
+          <a:chExt cx="0" cy="0"/>
+        </a:xfrm>
+      </p:grpSpPr>
+      <p:sp>
+        <p:nvSpPr>
+          <p:cNvPr id="2" name="Title 1">
+            <a:extLst>
+              <a:ext uri="{FF2B5EF4-FFF2-40B4-BE49-F238E27FC236}">
+                <a16:creationId xmlns:a16="http://schemas.microsoft.com/office/drawing/2014/main" id="{9C79905D-952A-1BCD-2F44-CD8471CA8814}"/>
+              </a:ext>
+            </a:extLst>
+          </p:cNvPr>
+          <p:cNvSpPr>
+            <a:spLocks noGrp="1"/>
+          </p:cNvSpPr>
+          <p:nvPr>
+            <p:ph type="title"/>
+          </p:nvPr>
+        </p:nvSpPr>
+        <p:spPr>
+          <a:xfrm>
+            <a:off x="355599" y="234315"/>
+            <a:ext cx="8421512" cy="830997"/>
+          </a:xfrm>
+        </p:spPr>
+        <p:txBody>
+          <a:bodyPr/>
+          <a:lstStyle/>
+          <a:p>
+            <a:r>
+              <a:rPr lang="en-US" dirty="0"/>
+              <a:t>Introduction</a:t>
+            </a:r>
+          </a:p>
+        </p:txBody>
+      </p:sp>
+      <p:sp>
+        <p:nvSpPr>
+          <p:cNvPr id="3" name="Content Placeholder 2">
+            <a:extLst>
+              <a:ext uri="{FF2B5EF4-FFF2-40B4-BE49-F238E27FC236}">
+                <a16:creationId xmlns:a16="http://schemas.microsoft.com/office/drawing/2014/main" id="{D4DF2025-9D73-F447-BBBE-0E79AB9A5D0C}"/>
+              </a:ext>
+            </a:extLst>
+          </p:cNvPr>
+          <p:cNvSpPr>
+            <a:spLocks noGrp="1"/>
+          </p:cNvSpPr>
+          <p:nvPr>
+            <p:ph idx="1"/>
+          </p:nvPr>
+        </p:nvSpPr>
+        <p:spPr>
+          <a:xfrm>
+            <a:off x="372532" y="1065312"/>
+            <a:ext cx="8387645" cy="5215465"/>
+          </a:xfrm>
+        </p:spPr>
+        <p:txBody>
+          <a:bodyPr/>
+          <a:lstStyle/>
+          <a:p>
+            <a:r>
+              <a:rPr lang="en-US" dirty="0"/>
+              <a:t>Titrations are used to determine quantitatively amounts (as concentrations) of a substance in solution</a:t>
+            </a:r>
+          </a:p>
+          <a:p>
+            <a:r>
+              <a:rPr lang="en-US" dirty="0"/>
+              <a:t>This experiment will use sodium hydroxide (NaOH) as a titrant to determine the concentration of citric acid in a lemon-lime soft drink in Part II of the experiment</a:t>
+            </a:r>
+          </a:p>
+          <a:p>
+            <a:r>
+              <a:rPr lang="en-US" dirty="0"/>
+              <a:t>But in Part I of the experiment, it will be necessary to standardize the titrant (i.e. determine its exact concentration) by titrating a known mass of oxalic acid dissolved in aqueous solution with the NaOH.</a:t>
+            </a:r>
+          </a:p>
+          <a:p>
+            <a:endParaRPr lang="en-US" dirty="0"/>
+          </a:p>
+        </p:txBody>
+      </p:sp>
+      <p:sp>
+        <p:nvSpPr>
+          <p:cNvPr id="4" name="Slide Number Placeholder 3">
+            <a:extLst>
+              <a:ext uri="{FF2B5EF4-FFF2-40B4-BE49-F238E27FC236}">
+                <a16:creationId xmlns:a16="http://schemas.microsoft.com/office/drawing/2014/main" id="{08C7C9AA-4AB5-7E32-E13A-D7AC841BB31C}"/>
+              </a:ext>
+            </a:extLst>
+          </p:cNvPr>
+          <p:cNvSpPr>
+            <a:spLocks noGrp="1"/>
+          </p:cNvSpPr>
+          <p:nvPr>
+            <p:ph type="sldNum" sz="quarter" idx="10"/>
+          </p:nvPr>
+        </p:nvSpPr>
+        <p:spPr/>
+        <p:txBody>
+          <a:bodyPr/>
+          <a:lstStyle/>
+          <a:p>
+            <a:fld id="{DA7C98CF-2420-4B97-8881-079E520414F2}" type="slidenum">
+              <a:rPr lang="en-US" smtClean="0"/>
+              <a:pPr/>
+              <a:t>2</a:t>
+            </a:fld>
+            <a:endParaRPr lang="en-US" b="1" dirty="0"/>
+          </a:p>
+        </p:txBody>
+      </p:sp>
+    </p:spTree>
+    <p:extLst>
+      <p:ext uri="{BB962C8B-B14F-4D97-AF65-F5344CB8AC3E}">
+        <p14:creationId xmlns:p14="http://schemas.microsoft.com/office/powerpoint/2010/main" val="1442188138"/>
+      </p:ext>
+    </p:extLst>
+  </p:cSld>
+  <p:clrMapOvr>
+    <a:masterClrMapping/>
+  </p:clrMapOvr>
+</p:sld>
+</file>
+
+<file path=ppt/slides/slide20.xml><?xml version="1.0" encoding="utf-8"?>
 <p:sld xmlns:a="http://schemas.openxmlformats.org/drawingml/2006/main" xmlns:r="http://schemas.openxmlformats.org/officeDocument/2006/relationships" xmlns:p="http://schemas.openxmlformats.org/presentationml/2006/main">
   <p:cSld>
     <p:spTree>
@@ -11222,6 +12417,36 @@
           </a:prstGeom>
         </p:spPr>
       </p:pic>
+      <p:sp>
+        <p:nvSpPr>
+          <p:cNvPr id="3" name="Slide Number Placeholder 2">
+            <a:extLst>
+              <a:ext uri="{FF2B5EF4-FFF2-40B4-BE49-F238E27FC236}">
+                <a16:creationId xmlns:a16="http://schemas.microsoft.com/office/drawing/2014/main" id="{63593711-44BA-B001-5B0B-7C00CAA409D7}"/>
+              </a:ext>
+            </a:extLst>
+          </p:cNvPr>
+          <p:cNvSpPr>
+            <a:spLocks noGrp="1"/>
+          </p:cNvSpPr>
+          <p:nvPr>
+            <p:ph type="sldNum" sz="quarter" idx="10"/>
+          </p:nvPr>
+        </p:nvSpPr>
+        <p:spPr/>
+        <p:txBody>
+          <a:bodyPr/>
+          <a:lstStyle/>
+          <a:p>
+            <a:fld id="{DA7C98CF-2420-4B97-8881-079E520414F2}" type="slidenum">
+              <a:rPr lang="en-US" smtClean="0"/>
+              <a:pPr/>
+              <a:t>20</a:t>
+            </a:fld>
+            <a:endParaRPr lang="en-US" b="1" dirty="0"/>
+          </a:p>
+        </p:txBody>
+      </p:sp>
     </p:spTree>
     <p:extLst>
       <p:ext uri="{BB962C8B-B14F-4D97-AF65-F5344CB8AC3E}">
@@ -11235,104 +12460,7 @@
 </p:sld>
 </file>
 
-<file path=ppt/slides/slide17.xml><?xml version="1.0" encoding="utf-8"?>
-<p:sld xmlns:a="http://schemas.openxmlformats.org/drawingml/2006/main" xmlns:r="http://schemas.openxmlformats.org/officeDocument/2006/relationships" xmlns:p="http://schemas.openxmlformats.org/presentationml/2006/main">
-  <p:cSld>
-    <p:spTree>
-      <p:nvGrpSpPr>
-        <p:cNvPr id="1" name=""/>
-        <p:cNvGrpSpPr/>
-        <p:nvPr/>
-      </p:nvGrpSpPr>
-      <p:grpSpPr>
-        <a:xfrm>
-          <a:off x="0" y="0"/>
-          <a:ext cx="0" cy="0"/>
-          <a:chOff x="0" y="0"/>
-          <a:chExt cx="0" cy="0"/>
-        </a:xfrm>
-      </p:grpSpPr>
-      <p:sp>
-        <p:nvSpPr>
-          <p:cNvPr id="2" name="Title 1">
-            <a:extLst>
-              <a:ext uri="{FF2B5EF4-FFF2-40B4-BE49-F238E27FC236}">
-                <a16:creationId xmlns:a16="http://schemas.microsoft.com/office/drawing/2014/main" id="{4E7C79B0-B384-1533-BACA-0EA95D4089F9}"/>
-              </a:ext>
-            </a:extLst>
-          </p:cNvPr>
-          <p:cNvSpPr>
-            <a:spLocks noGrp="1"/>
-          </p:cNvSpPr>
-          <p:nvPr>
-            <p:ph type="title"/>
-          </p:nvPr>
-        </p:nvSpPr>
-        <p:spPr/>
-        <p:txBody>
-          <a:bodyPr/>
-          <a:lstStyle/>
-          <a:p>
-            <a:r>
-              <a:rPr lang="en-US" dirty="0"/>
-              <a:t>Clean Up</a:t>
-            </a:r>
-          </a:p>
-        </p:txBody>
-      </p:sp>
-      <p:sp>
-        <p:nvSpPr>
-          <p:cNvPr id="3" name="Content Placeholder 2">
-            <a:extLst>
-              <a:ext uri="{FF2B5EF4-FFF2-40B4-BE49-F238E27FC236}">
-                <a16:creationId xmlns:a16="http://schemas.microsoft.com/office/drawing/2014/main" id="{F122473B-F6C9-7A59-3DAB-7CBF32F68EB5}"/>
-              </a:ext>
-            </a:extLst>
-          </p:cNvPr>
-          <p:cNvSpPr>
-            <a:spLocks noGrp="1"/>
-          </p:cNvSpPr>
-          <p:nvPr>
-            <p:ph idx="1"/>
-          </p:nvPr>
-        </p:nvSpPr>
-        <p:spPr/>
-        <p:txBody>
-          <a:bodyPr/>
-          <a:lstStyle/>
-          <a:p>
-            <a:r>
-              <a:rPr lang="en-US" dirty="0"/>
-              <a:t>Pour waste solutions in the aqueous solution carboy located in the fume hood (</a:t>
-            </a:r>
-            <a:r>
-              <a:rPr lang="en-US"/>
-              <a:t>usually placed near door)</a:t>
-            </a:r>
-            <a:endParaRPr lang="en-US" dirty="0"/>
-          </a:p>
-          <a:p>
-            <a:r>
-              <a:rPr lang="en-US" dirty="0"/>
-              <a:t>Clean up other equipment as done previously in the lab</a:t>
-            </a:r>
-          </a:p>
-        </p:txBody>
-      </p:sp>
-    </p:spTree>
-    <p:extLst>
-      <p:ext uri="{BB962C8B-B14F-4D97-AF65-F5344CB8AC3E}">
-        <p14:creationId xmlns:p14="http://schemas.microsoft.com/office/powerpoint/2010/main" val="3469914632"/>
-      </p:ext>
-    </p:extLst>
-  </p:cSld>
-  <p:clrMapOvr>
-    <a:masterClrMapping/>
-  </p:clrMapOvr>
-</p:sld>
-</file>
-
-<file path=ppt/slides/slide2.xml><?xml version="1.0" encoding="utf-8"?>
+<file path=ppt/slides/slide3.xml><?xml version="1.0" encoding="utf-8"?>
 <p:sld xmlns:a="http://schemas.openxmlformats.org/drawingml/2006/main" xmlns:r="http://schemas.openxmlformats.org/officeDocument/2006/relationships" xmlns:p="http://schemas.openxmlformats.org/presentationml/2006/main">
   <p:cSld>
     <p:spTree>
@@ -11367,7 +12495,7 @@
         </p:nvSpPr>
         <p:spPr>
           <a:xfrm>
-            <a:off x="355599" y="234315"/>
+            <a:off x="349956" y="234315"/>
             <a:ext cx="8421512" cy="830997"/>
           </a:xfrm>
         </p:spPr>
@@ -11377,7 +12505,7 @@
           <a:p>
             <a:r>
               <a:rPr lang="en-US" dirty="0"/>
-              <a:t>Introduction</a:t>
+              <a:t>Background</a:t>
             </a:r>
           </a:p>
         </p:txBody>
@@ -11410,17 +12538,440 @@
           <a:p>
             <a:r>
               <a:rPr lang="en-US" dirty="0"/>
-              <a:t>Titrations are used to determine quantitatively amounts (as concentrations) of a substance in solution</a:t>
-            </a:r>
-          </a:p>
-          <a:p>
+              <a:t>Acids and bases react with each other to </a:t>
+            </a:r>
+            <a:r>
+              <a:rPr lang="en-US" b="1" dirty="0">
+                <a:solidFill>
+                  <a:srgbClr val="00FF00"/>
+                </a:solidFill>
+              </a:rPr>
+              <a:t>neutralize</a:t>
+            </a:r>
             <a:r>
               <a:rPr lang="en-US" dirty="0"/>
-              <a:t>This experiment will use sodium hydroxide (NaOH) as a titrant to determine amount/concentration of citric acid in a lemon-lime soft drink</a:t>
-            </a:r>
-          </a:p>
-          <a:p>
-            <a:endParaRPr lang="en-US" dirty="0"/>
+              <a:t> each other</a:t>
+            </a:r>
+          </a:p>
+          <a:p>
+            <a:r>
+              <a:rPr lang="en-US" sz="2000" dirty="0"/>
+              <a:t>First some key elements to set up the explanation</a:t>
+            </a:r>
+            <a:r>
+              <a:rPr lang="en-US" dirty="0"/>
+              <a:t>:</a:t>
+            </a:r>
+          </a:p>
+          <a:p>
+            <a:pPr lvl="1"/>
+            <a:r>
+              <a:rPr lang="en-US" b="1" dirty="0">
+                <a:solidFill>
+                  <a:srgbClr val="FFC000"/>
+                </a:solidFill>
+              </a:rPr>
+              <a:t>HX</a:t>
+            </a:r>
+            <a:r>
+              <a:rPr lang="en-US" dirty="0"/>
+              <a:t> is an acid. The acid can be </a:t>
+            </a:r>
+            <a:r>
+              <a:rPr lang="en-US" dirty="0">
+                <a:solidFill>
+                  <a:srgbClr val="FFFF00"/>
+                </a:solidFill>
+              </a:rPr>
+              <a:t>strong</a:t>
+            </a:r>
+            <a:r>
+              <a:rPr lang="en-US" dirty="0"/>
+              <a:t> or </a:t>
+            </a:r>
+            <a:r>
+              <a:rPr lang="en-US" dirty="0">
+                <a:solidFill>
+                  <a:srgbClr val="FFFF00"/>
+                </a:solidFill>
+              </a:rPr>
+              <a:t>weak</a:t>
+            </a:r>
+            <a:r>
+              <a:rPr lang="en-US" dirty="0"/>
+              <a:t>, but the </a:t>
+            </a:r>
+            <a:r>
+              <a:rPr lang="en-US" b="1" dirty="0">
+                <a:solidFill>
+                  <a:srgbClr val="FFFF00"/>
+                </a:solidFill>
+              </a:rPr>
+              <a:t>H</a:t>
+            </a:r>
+            <a:r>
+              <a:rPr lang="en-US" dirty="0"/>
+              <a:t> produces an </a:t>
+            </a:r>
+            <a:r>
+              <a:rPr lang="en-US" b="1" dirty="0">
+                <a:solidFill>
+                  <a:srgbClr val="FFC000"/>
+                </a:solidFill>
+              </a:rPr>
+              <a:t>H</a:t>
+            </a:r>
+            <a:r>
+              <a:rPr lang="en-US" b="1" baseline="30000" dirty="0">
+                <a:solidFill>
+                  <a:srgbClr val="FFC000"/>
+                </a:solidFill>
+              </a:rPr>
+              <a:t>+</a:t>
+            </a:r>
+            <a:r>
+              <a:rPr lang="en-US" dirty="0"/>
+              <a:t> (proton) in solution, and </a:t>
+            </a:r>
+            <a:r>
+              <a:rPr lang="en-US" b="1" dirty="0">
+                <a:solidFill>
+                  <a:srgbClr val="FFC000"/>
+                </a:solidFill>
+              </a:rPr>
+              <a:t>X</a:t>
+            </a:r>
+            <a:r>
+              <a:rPr lang="en-US" b="1" baseline="30000" dirty="0">
+                <a:solidFill>
+                  <a:srgbClr val="FFC000"/>
+                </a:solidFill>
+              </a:rPr>
+              <a:t>–</a:t>
+            </a:r>
+            <a:r>
+              <a:rPr lang="en-US" dirty="0"/>
+              <a:t> is the </a:t>
+            </a:r>
+            <a:r>
+              <a:rPr lang="en-US" dirty="0">
+                <a:solidFill>
+                  <a:schemeClr val="accent1">
+                    <a:lumMod val="60000"/>
+                    <a:lumOff val="40000"/>
+                  </a:schemeClr>
+                </a:solidFill>
+              </a:rPr>
+              <a:t>conjugate base</a:t>
+            </a:r>
+            <a:r>
+              <a:rPr lang="en-US" dirty="0"/>
+              <a:t>. The acid might </a:t>
+            </a:r>
+            <a:r>
+              <a:rPr lang="en-US" b="1" dirty="0">
+                <a:solidFill>
+                  <a:srgbClr val="FFC000"/>
+                </a:solidFill>
+              </a:rPr>
+              <a:t>HCl</a:t>
+            </a:r>
+            <a:r>
+              <a:rPr lang="en-US" dirty="0"/>
+              <a:t> (strong) or </a:t>
+            </a:r>
+            <a:r>
+              <a:rPr lang="en-US" b="1" dirty="0">
+                <a:solidFill>
+                  <a:srgbClr val="FFC000"/>
+                </a:solidFill>
+              </a:rPr>
+              <a:t>CH</a:t>
+            </a:r>
+            <a:r>
+              <a:rPr lang="en-US" b="1" baseline="-25000" dirty="0">
+                <a:solidFill>
+                  <a:srgbClr val="FFC000"/>
+                </a:solidFill>
+              </a:rPr>
+              <a:t>3</a:t>
+            </a:r>
+            <a:r>
+              <a:rPr lang="en-US" b="1" dirty="0">
+                <a:solidFill>
+                  <a:srgbClr val="FFC000"/>
+                </a:solidFill>
+              </a:rPr>
+              <a:t>COOH</a:t>
+            </a:r>
+            <a:r>
+              <a:rPr lang="en-US" dirty="0"/>
+              <a:t> [acetic acid] (weak). These produce one H</a:t>
+            </a:r>
+            <a:r>
+              <a:rPr lang="en-US" baseline="30000" dirty="0"/>
+              <a:t>+</a:t>
+            </a:r>
+            <a:r>
+              <a:rPr lang="en-US" dirty="0"/>
+              <a:t> (proton) in solution</a:t>
+            </a:r>
+          </a:p>
+          <a:p>
+            <a:pPr lvl="1"/>
+            <a:r>
+              <a:rPr lang="en-US" b="1" dirty="0">
+                <a:solidFill>
+                  <a:srgbClr val="FFC000"/>
+                </a:solidFill>
+              </a:rPr>
+              <a:t>MOH</a:t>
+            </a:r>
+            <a:r>
+              <a:rPr lang="en-US" dirty="0"/>
+              <a:t> or </a:t>
+            </a:r>
+            <a:r>
+              <a:rPr lang="en-US" b="1" dirty="0">
+                <a:solidFill>
+                  <a:srgbClr val="FFC000"/>
+                </a:solidFill>
+              </a:rPr>
+              <a:t>MOR</a:t>
+            </a:r>
+            <a:r>
+              <a:rPr lang="en-US" dirty="0"/>
+              <a:t> is a base, where </a:t>
+            </a:r>
+            <a:r>
+              <a:rPr lang="en-US" b="1" dirty="0">
+                <a:solidFill>
+                  <a:srgbClr val="FFC000"/>
+                </a:solidFill>
+              </a:rPr>
+              <a:t>M</a:t>
+            </a:r>
+            <a:r>
+              <a:rPr lang="en-US" dirty="0"/>
+              <a:t> is </a:t>
+            </a:r>
+            <a:r>
+              <a:rPr lang="en-US" dirty="0">
+                <a:solidFill>
+                  <a:schemeClr val="accent1">
+                    <a:lumMod val="60000"/>
+                    <a:lumOff val="40000"/>
+                  </a:schemeClr>
+                </a:solidFill>
+              </a:rPr>
+              <a:t>cation</a:t>
+            </a:r>
+            <a:r>
+              <a:rPr lang="en-US" dirty="0"/>
+              <a:t>, like metal cation (Na</a:t>
+            </a:r>
+            <a:r>
+              <a:rPr lang="en-US" baseline="30000" dirty="0"/>
+              <a:t>+</a:t>
+            </a:r>
+            <a:r>
+              <a:rPr lang="en-US" dirty="0"/>
+              <a:t>, K</a:t>
+            </a:r>
+            <a:r>
+              <a:rPr lang="en-US" baseline="30000" dirty="0"/>
+              <a:t>+</a:t>
+            </a:r>
+            <a:r>
+              <a:rPr lang="en-US" dirty="0"/>
+              <a:t>, Ca</a:t>
+            </a:r>
+            <a:r>
+              <a:rPr lang="en-US" baseline="30000" dirty="0"/>
+              <a:t>2+</a:t>
+            </a:r>
+            <a:r>
+              <a:rPr lang="en-US" dirty="0"/>
+              <a:t>, Mg</a:t>
+            </a:r>
+            <a:r>
+              <a:rPr lang="en-US" baseline="30000" dirty="0"/>
+              <a:t>2+</a:t>
+            </a:r>
+            <a:r>
+              <a:rPr lang="en-US" dirty="0"/>
+              <a:t>, and many more). The base can be </a:t>
+            </a:r>
+            <a:r>
+              <a:rPr lang="en-US" dirty="0">
+                <a:solidFill>
+                  <a:srgbClr val="FFFF00"/>
+                </a:solidFill>
+              </a:rPr>
+              <a:t>strong</a:t>
+            </a:r>
+            <a:r>
+              <a:rPr lang="en-US" dirty="0"/>
+              <a:t> or </a:t>
+            </a:r>
+            <a:r>
+              <a:rPr lang="en-US" dirty="0">
+                <a:solidFill>
+                  <a:srgbClr val="FFFF00"/>
+                </a:solidFill>
+              </a:rPr>
+              <a:t>weak</a:t>
+            </a:r>
+            <a:r>
+              <a:rPr lang="en-US" dirty="0"/>
+              <a:t>, but the OH part produces </a:t>
+            </a:r>
+            <a:r>
+              <a:rPr lang="en-US" b="1" dirty="0">
+                <a:solidFill>
+                  <a:srgbClr val="FFC000"/>
+                </a:solidFill>
+              </a:rPr>
+              <a:t>OH</a:t>
+            </a:r>
+            <a:r>
+              <a:rPr lang="en-US" b="1" baseline="30000" dirty="0">
+                <a:solidFill>
+                  <a:srgbClr val="FFC000"/>
+                </a:solidFill>
+              </a:rPr>
+              <a:t>–</a:t>
+            </a:r>
+            <a:r>
+              <a:rPr lang="en-US" dirty="0"/>
+              <a:t> (hydroxyl ion) which is a strong base in solution. Or the OR part can produce </a:t>
+            </a:r>
+            <a:r>
+              <a:rPr lang="en-US" b="1" dirty="0">
+                <a:solidFill>
+                  <a:srgbClr val="FFC000"/>
+                </a:solidFill>
+              </a:rPr>
+              <a:t>OR</a:t>
+            </a:r>
+            <a:r>
+              <a:rPr lang="en-US" b="1" baseline="30000" dirty="0">
+                <a:solidFill>
+                  <a:srgbClr val="FFC000"/>
+                </a:solidFill>
+              </a:rPr>
+              <a:t>–</a:t>
+            </a:r>
+            <a:r>
+              <a:rPr lang="en-US" baseline="30000" dirty="0"/>
+              <a:t> </a:t>
+            </a:r>
+            <a:r>
+              <a:rPr lang="en-US" dirty="0"/>
+              <a:t>which is a weak base in solution. An example of MOH is </a:t>
+            </a:r>
+            <a:r>
+              <a:rPr lang="en-US" b="1" dirty="0">
+                <a:solidFill>
+                  <a:srgbClr val="FFC000"/>
+                </a:solidFill>
+              </a:rPr>
+              <a:t>NaOH</a:t>
+            </a:r>
+            <a:r>
+              <a:rPr lang="en-US" dirty="0"/>
+              <a:t> or </a:t>
+            </a:r>
+            <a:r>
+              <a:rPr lang="en-US" b="1" dirty="0">
+                <a:solidFill>
+                  <a:srgbClr val="FFC000"/>
+                </a:solidFill>
+              </a:rPr>
+              <a:t>KOH</a:t>
+            </a:r>
+            <a:r>
+              <a:rPr lang="en-US" dirty="0"/>
+              <a:t>. An example of MOR is </a:t>
+            </a:r>
+            <a:r>
+              <a:rPr lang="en-US" b="1" dirty="0">
+                <a:solidFill>
+                  <a:srgbClr val="FFC000"/>
+                </a:solidFill>
+              </a:rPr>
+              <a:t>CH</a:t>
+            </a:r>
+            <a:r>
+              <a:rPr lang="en-US" b="1" baseline="-25000" dirty="0">
+                <a:solidFill>
+                  <a:srgbClr val="FFC000"/>
+                </a:solidFill>
+              </a:rPr>
+              <a:t>3</a:t>
+            </a:r>
+            <a:r>
+              <a:rPr lang="en-US" b="1" dirty="0">
+                <a:solidFill>
+                  <a:srgbClr val="FFC000"/>
+                </a:solidFill>
+              </a:rPr>
+              <a:t>COONa</a:t>
+            </a:r>
+            <a:r>
+              <a:rPr lang="en-US" dirty="0"/>
+              <a:t> (sodium acetate) or </a:t>
+            </a:r>
+            <a:r>
+              <a:rPr lang="en-US" b="1" dirty="0">
+                <a:solidFill>
+                  <a:srgbClr val="FFC000"/>
+                </a:solidFill>
+              </a:rPr>
+              <a:t>HCOOK</a:t>
+            </a:r>
+            <a:r>
+              <a:rPr lang="en-US" dirty="0"/>
+              <a:t> (potassium </a:t>
+            </a:r>
+            <a:r>
+              <a:rPr lang="en-US" dirty="0" err="1"/>
+              <a:t>formate</a:t>
+            </a:r>
+            <a:r>
+              <a:rPr lang="en-US" dirty="0"/>
+              <a:t>)</a:t>
+            </a:r>
+          </a:p>
+        </p:txBody>
+      </p:sp>
+      <p:sp>
+        <p:nvSpPr>
+          <p:cNvPr id="4" name="Slide Number Placeholder 3">
+            <a:extLst>
+              <a:ext uri="{FF2B5EF4-FFF2-40B4-BE49-F238E27FC236}">
+                <a16:creationId xmlns:a16="http://schemas.microsoft.com/office/drawing/2014/main" id="{12C3FC6A-E308-4997-97B1-883F01747710}"/>
+              </a:ext>
+            </a:extLst>
+          </p:cNvPr>
+          <p:cNvSpPr>
+            <a:spLocks noGrp="1"/>
+          </p:cNvSpPr>
+          <p:nvPr>
+            <p:ph type="sldNum" sz="quarter" idx="10"/>
+          </p:nvPr>
+        </p:nvSpPr>
+        <p:spPr/>
+        <p:txBody>
+          <a:bodyPr/>
+          <a:lstStyle/>
+          <a:p>
+            <a:fld id="{DA7C98CF-2420-4B97-8881-079E520414F2}" type="slidenum">
+              <a:rPr lang="en-US" smtClean="0"/>
+              <a:pPr/>
+              <a:t>3</a:t>
+            </a:fld>
+            <a:endParaRPr lang="en-US" b="1" dirty="0"/>
           </a:p>
         </p:txBody>
       </p:sp>
@@ -11437,7 +12988,965 @@
 </p:sld>
 </file>
 
-<file path=ppt/slides/slide3.xml><?xml version="1.0" encoding="utf-8"?>
+<file path=ppt/slides/slide4.xml><?xml version="1.0" encoding="utf-8"?>
+<p:sld xmlns:a="http://schemas.openxmlformats.org/drawingml/2006/main" xmlns:r="http://schemas.openxmlformats.org/officeDocument/2006/relationships" xmlns:p="http://schemas.openxmlformats.org/presentationml/2006/main">
+  <p:cSld>
+    <p:spTree>
+      <p:nvGrpSpPr>
+        <p:cNvPr id="1" name="">
+          <a:extLst>
+            <a:ext uri="{FF2B5EF4-FFF2-40B4-BE49-F238E27FC236}">
+              <a16:creationId xmlns:a16="http://schemas.microsoft.com/office/drawing/2014/main" id="{E12FA19D-9471-B003-2904-94DDF16BCE31}"/>
+            </a:ext>
+          </a:extLst>
+        </p:cNvPr>
+        <p:cNvGrpSpPr/>
+        <p:nvPr/>
+      </p:nvGrpSpPr>
+      <p:grpSpPr>
+        <a:xfrm>
+          <a:off x="0" y="0"/>
+          <a:ext cx="0" cy="0"/>
+          <a:chOff x="0" y="0"/>
+          <a:chExt cx="0" cy="0"/>
+        </a:xfrm>
+      </p:grpSpPr>
+      <p:sp>
+        <p:nvSpPr>
+          <p:cNvPr id="2" name="Title 1">
+            <a:extLst>
+              <a:ext uri="{FF2B5EF4-FFF2-40B4-BE49-F238E27FC236}">
+                <a16:creationId xmlns:a16="http://schemas.microsoft.com/office/drawing/2014/main" id="{E4A8C868-1D5A-04E0-6AFA-8C8B8CBC59F2}"/>
+              </a:ext>
+            </a:extLst>
+          </p:cNvPr>
+          <p:cNvSpPr>
+            <a:spLocks noGrp="1"/>
+          </p:cNvSpPr>
+          <p:nvPr>
+            <p:ph type="title"/>
+          </p:nvPr>
+        </p:nvSpPr>
+        <p:spPr>
+          <a:xfrm>
+            <a:off x="349956" y="234315"/>
+            <a:ext cx="8421512" cy="830997"/>
+          </a:xfrm>
+        </p:spPr>
+        <p:txBody>
+          <a:bodyPr/>
+          <a:lstStyle/>
+          <a:p>
+            <a:r>
+              <a:rPr lang="en-US" dirty="0"/>
+              <a:t>Background</a:t>
+            </a:r>
+          </a:p>
+        </p:txBody>
+      </p:sp>
+      <mc:AlternateContent xmlns:mc="http://schemas.openxmlformats.org/markup-compatibility/2006" xmlns:a14="http://schemas.microsoft.com/office/drawing/2010/main">
+        <mc:Choice Requires="a14">
+          <p:sp>
+            <p:nvSpPr>
+              <p:cNvPr id="3" name="Content Placeholder 2">
+                <a:extLst>
+                  <a:ext uri="{FF2B5EF4-FFF2-40B4-BE49-F238E27FC236}">
+                    <a16:creationId xmlns:a16="http://schemas.microsoft.com/office/drawing/2014/main" id="{02559A82-C2B4-86C0-0491-F618E5CE6802}"/>
+                  </a:ext>
+                </a:extLst>
+              </p:cNvPr>
+              <p:cNvSpPr>
+                <a:spLocks noGrp="1"/>
+              </p:cNvSpPr>
+              <p:nvPr>
+                <p:ph idx="1"/>
+              </p:nvPr>
+            </p:nvSpPr>
+            <p:spPr>
+              <a:xfrm>
+                <a:off x="197224" y="1065312"/>
+                <a:ext cx="8562953" cy="5215465"/>
+              </a:xfrm>
+            </p:spPr>
+            <p:txBody>
+              <a:bodyPr/>
+              <a:lstStyle/>
+              <a:p>
+                <a:r>
+                  <a:rPr lang="en-US" sz="2000" dirty="0"/>
+                  <a:t>In neutralizing each other, the pattern is always the same, whether weak or strong acids react with weak or strong bases</a:t>
+                </a:r>
+              </a:p>
+              <a:p>
+                <a:pPr marL="0" indent="0" algn="ctr">
+                  <a:buNone/>
+                </a:pPr>
+                <a:r>
+                  <a:rPr lang="en-US" sz="2000" dirty="0">
+                    <a:solidFill>
+                      <a:srgbClr val="FFC000"/>
+                    </a:solidFill>
+                    <a:sym typeface="Wingdings" panose="05000000000000000000" pitchFamily="2" charset="2"/>
+                  </a:rPr>
+                  <a:t>acid + base  water + salt</a:t>
+                </a:r>
+                <a:endParaRPr lang="en-US" sz="2000" dirty="0">
+                  <a:solidFill>
+                    <a:srgbClr val="FFC000"/>
+                  </a:solidFill>
+                </a:endParaRPr>
+              </a:p>
+              <a:p>
+                <a:pPr marL="0" indent="0" algn="ctr">
+                  <a:buNone/>
+                </a:pPr>
+                <a:r>
+                  <a:rPr lang="en-US" sz="2000" dirty="0">
+                    <a:solidFill>
+                      <a:srgbClr val="FFC000"/>
+                    </a:solidFill>
+                  </a:rPr>
+                  <a:t>HX + MOH </a:t>
+                </a:r>
+                <a:r>
+                  <a:rPr lang="en-US" sz="2000" dirty="0">
+                    <a:solidFill>
+                      <a:srgbClr val="FFC000"/>
+                    </a:solidFill>
+                    <a:sym typeface="Wingdings" panose="05000000000000000000" pitchFamily="2" charset="2"/>
+                  </a:rPr>
+                  <a:t> H</a:t>
+                </a:r>
+                <a:r>
+                  <a:rPr lang="en-US" sz="2000" baseline="-25000" dirty="0">
+                    <a:solidFill>
+                      <a:srgbClr val="FFC000"/>
+                    </a:solidFill>
+                    <a:sym typeface="Wingdings" panose="05000000000000000000" pitchFamily="2" charset="2"/>
+                  </a:rPr>
+                  <a:t>2</a:t>
+                </a:r>
+                <a:r>
+                  <a:rPr lang="en-US" sz="2000" dirty="0">
+                    <a:solidFill>
+                      <a:srgbClr val="FFC000"/>
+                    </a:solidFill>
+                    <a:sym typeface="Wingdings" panose="05000000000000000000" pitchFamily="2" charset="2"/>
+                  </a:rPr>
+                  <a:t>O + MX</a:t>
+                </a:r>
+              </a:p>
+              <a:p>
+                <a:pPr marL="0" indent="0" algn="ctr">
+                  <a:buNone/>
+                </a:pPr>
+                <a:r>
+                  <a:rPr lang="en-US" sz="2000" dirty="0">
+                    <a:solidFill>
+                      <a:srgbClr val="FFC000"/>
+                    </a:solidFill>
+                    <a:sym typeface="Wingdings" panose="05000000000000000000" pitchFamily="2" charset="2"/>
+                  </a:rPr>
+                  <a:t>HX + MOR  H</a:t>
+                </a:r>
+                <a:r>
+                  <a:rPr lang="en-US" sz="2000" baseline="-25000" dirty="0">
+                    <a:solidFill>
+                      <a:srgbClr val="FFC000"/>
+                    </a:solidFill>
+                    <a:sym typeface="Wingdings" panose="05000000000000000000" pitchFamily="2" charset="2"/>
+                  </a:rPr>
+                  <a:t>2</a:t>
+                </a:r>
+                <a:r>
+                  <a:rPr lang="en-US" sz="2000" dirty="0">
+                    <a:solidFill>
+                      <a:srgbClr val="FFC000"/>
+                    </a:solidFill>
+                    <a:sym typeface="Wingdings" panose="05000000000000000000" pitchFamily="2" charset="2"/>
+                  </a:rPr>
+                  <a:t>O + XOR</a:t>
+                </a:r>
+              </a:p>
+              <a:p>
+                <a:r>
+                  <a:rPr lang="en-US" sz="2200" dirty="0">
+                    <a:sym typeface="Wingdings" panose="05000000000000000000" pitchFamily="2" charset="2"/>
+                  </a:rPr>
+                  <a:t>Titration will make use of</a:t>
+                </a:r>
+                <a:br>
+                  <a:rPr lang="en-US" sz="2200" dirty="0">
+                    <a:sym typeface="Wingdings" panose="05000000000000000000" pitchFamily="2" charset="2"/>
+                  </a:rPr>
+                </a:br>
+                <a:r>
+                  <a:rPr lang="en-US" sz="2200" dirty="0">
+                    <a:sym typeface="Wingdings" panose="05000000000000000000" pitchFamily="2" charset="2"/>
+                  </a:rPr>
+                  <a:t>strong base NaOH to</a:t>
+                </a:r>
+                <a:br>
+                  <a:rPr lang="en-US" sz="2200" dirty="0">
+                    <a:sym typeface="Wingdings" panose="05000000000000000000" pitchFamily="2" charset="2"/>
+                  </a:rPr>
+                </a:br>
+                <a:r>
+                  <a:rPr lang="en-US" sz="2200" dirty="0">
+                    <a:sym typeface="Wingdings" panose="05000000000000000000" pitchFamily="2" charset="2"/>
+                  </a:rPr>
+                  <a:t>quantitate the weak acid</a:t>
+                </a:r>
+                <a:br>
+                  <a:rPr lang="en-US" sz="2200" dirty="0">
+                    <a:sym typeface="Wingdings" panose="05000000000000000000" pitchFamily="2" charset="2"/>
+                  </a:rPr>
+                </a:br>
+                <a:r>
+                  <a:rPr lang="en-US" sz="2200" dirty="0">
+                    <a:sym typeface="Wingdings" panose="05000000000000000000" pitchFamily="2" charset="2"/>
+                  </a:rPr>
+                  <a:t>citric acid (see structure)</a:t>
+                </a:r>
+              </a:p>
+              <a:p>
+                <a:r>
+                  <a:rPr lang="en-US" sz="2200" dirty="0">
+                    <a:sym typeface="Wingdings" panose="05000000000000000000" pitchFamily="2" charset="2"/>
+                  </a:rPr>
+                  <a:t>Citric acid has 3 acidic protons</a:t>
+                </a:r>
+                <a:br>
+                  <a:rPr lang="en-US" sz="2200" dirty="0">
+                    <a:sym typeface="Wingdings" panose="05000000000000000000" pitchFamily="2" charset="2"/>
+                  </a:rPr>
+                </a:br>
+                <a:r>
+                  <a:rPr lang="en-US" sz="2200" dirty="0">
+                    <a:sym typeface="Wingdings" panose="05000000000000000000" pitchFamily="2" charset="2"/>
+                  </a:rPr>
+                  <a:t>(circled green) so it will take</a:t>
+                </a:r>
+                <a:br>
+                  <a:rPr lang="en-US" sz="2200" dirty="0">
+                    <a:sym typeface="Wingdings" panose="05000000000000000000" pitchFamily="2" charset="2"/>
+                  </a:rPr>
+                </a:br>
+                <a:r>
+                  <a:rPr lang="en-US" sz="2200" dirty="0">
+                    <a:sym typeface="Wingdings" panose="05000000000000000000" pitchFamily="2" charset="2"/>
+                  </a:rPr>
+                  <a:t>3 molecules NaOH to neutralize</a:t>
+                </a:r>
+                <a:br>
+                  <a:rPr lang="en-US" sz="2200" dirty="0">
+                    <a:sym typeface="Wingdings" panose="05000000000000000000" pitchFamily="2" charset="2"/>
+                  </a:rPr>
+                </a:br>
+                <a:r>
+                  <a:rPr lang="en-US" sz="2200" dirty="0">
+                    <a:sym typeface="Wingdings" panose="05000000000000000000" pitchFamily="2" charset="2"/>
+                  </a:rPr>
+                  <a:t>1 molecule of citric acid</a:t>
+                </a:r>
+              </a:p>
+              <a:p>
+                <a:r>
+                  <a:rPr lang="en-US" sz="2200" dirty="0">
+                    <a:sym typeface="Wingdings" panose="05000000000000000000" pitchFamily="2" charset="2"/>
+                  </a:rPr>
+                  <a:t>Reaction ratio: </a:t>
+                </a:r>
+                <a14:m>
+                  <m:oMath xmlns:m="http://schemas.openxmlformats.org/officeDocument/2006/math">
+                    <m:f>
+                      <m:fPr>
+                        <m:ctrlPr>
+                          <a:rPr lang="en-US" sz="2200" i="1" smtClean="0">
+                            <a:latin typeface="Cambria Math" panose="02040503050406030204" pitchFamily="18" charset="0"/>
+                            <a:sym typeface="Wingdings" panose="05000000000000000000" pitchFamily="2" charset="2"/>
+                          </a:rPr>
+                        </m:ctrlPr>
+                      </m:fPr>
+                      <m:num>
+                        <m:r>
+                          <a:rPr lang="en-US" sz="2200" b="0" i="0" smtClean="0">
+                            <a:latin typeface="Cambria Math" panose="02040503050406030204" pitchFamily="18" charset="0"/>
+                            <a:sym typeface="Wingdings" panose="05000000000000000000" pitchFamily="2" charset="2"/>
+                          </a:rPr>
+                          <m:t>1 </m:t>
+                        </m:r>
+                        <m:r>
+                          <m:rPr>
+                            <m:sty m:val="p"/>
+                          </m:rPr>
+                          <a:rPr lang="en-US" sz="2200" b="0" i="0" smtClean="0">
+                            <a:latin typeface="Cambria Math" panose="02040503050406030204" pitchFamily="18" charset="0"/>
+                            <a:sym typeface="Wingdings" panose="05000000000000000000" pitchFamily="2" charset="2"/>
+                          </a:rPr>
+                          <m:t>mole</m:t>
+                        </m:r>
+                        <m:r>
+                          <a:rPr lang="en-US" sz="2200" b="0" i="0" smtClean="0">
+                            <a:latin typeface="Cambria Math" panose="02040503050406030204" pitchFamily="18" charset="0"/>
+                            <a:sym typeface="Wingdings" panose="05000000000000000000" pitchFamily="2" charset="2"/>
+                          </a:rPr>
+                          <m:t> </m:t>
+                        </m:r>
+                        <m:r>
+                          <m:rPr>
+                            <m:sty m:val="p"/>
+                          </m:rPr>
+                          <a:rPr lang="en-US" sz="2200" b="0" i="0" smtClean="0">
+                            <a:latin typeface="Cambria Math" panose="02040503050406030204" pitchFamily="18" charset="0"/>
+                            <a:sym typeface="Wingdings" panose="05000000000000000000" pitchFamily="2" charset="2"/>
+                          </a:rPr>
+                          <m:t>citric</m:t>
+                        </m:r>
+                        <m:r>
+                          <a:rPr lang="en-US" sz="2200" b="0" i="0" smtClean="0">
+                            <a:latin typeface="Cambria Math" panose="02040503050406030204" pitchFamily="18" charset="0"/>
+                            <a:sym typeface="Wingdings" panose="05000000000000000000" pitchFamily="2" charset="2"/>
+                          </a:rPr>
+                          <m:t> </m:t>
+                        </m:r>
+                        <m:r>
+                          <m:rPr>
+                            <m:sty m:val="p"/>
+                          </m:rPr>
+                          <a:rPr lang="en-US" sz="2200" b="0" i="0" smtClean="0">
+                            <a:latin typeface="Cambria Math" panose="02040503050406030204" pitchFamily="18" charset="0"/>
+                            <a:sym typeface="Wingdings" panose="05000000000000000000" pitchFamily="2" charset="2"/>
+                          </a:rPr>
+                          <m:t>acid</m:t>
+                        </m:r>
+                      </m:num>
+                      <m:den>
+                        <m:r>
+                          <a:rPr lang="en-US" sz="2200" b="0" i="0" smtClean="0">
+                            <a:latin typeface="Cambria Math" panose="02040503050406030204" pitchFamily="18" charset="0"/>
+                            <a:sym typeface="Wingdings" panose="05000000000000000000" pitchFamily="2" charset="2"/>
+                          </a:rPr>
+                          <m:t>3 </m:t>
+                        </m:r>
+                        <m:r>
+                          <m:rPr>
+                            <m:sty m:val="p"/>
+                          </m:rPr>
+                          <a:rPr lang="en-US" sz="2200" b="0" i="0" smtClean="0">
+                            <a:latin typeface="Cambria Math" panose="02040503050406030204" pitchFamily="18" charset="0"/>
+                            <a:sym typeface="Wingdings" panose="05000000000000000000" pitchFamily="2" charset="2"/>
+                          </a:rPr>
+                          <m:t>moles</m:t>
+                        </m:r>
+                        <m:r>
+                          <a:rPr lang="en-US" sz="2200" b="0" i="0" smtClean="0">
+                            <a:latin typeface="Cambria Math" panose="02040503050406030204" pitchFamily="18" charset="0"/>
+                            <a:sym typeface="Wingdings" panose="05000000000000000000" pitchFamily="2" charset="2"/>
+                          </a:rPr>
+                          <m:t> </m:t>
+                        </m:r>
+                        <m:r>
+                          <m:rPr>
+                            <m:sty m:val="p"/>
+                          </m:rPr>
+                          <a:rPr lang="en-US" sz="2200" b="0" i="0" smtClean="0">
+                            <a:latin typeface="Cambria Math" panose="02040503050406030204" pitchFamily="18" charset="0"/>
+                            <a:sym typeface="Wingdings" panose="05000000000000000000" pitchFamily="2" charset="2"/>
+                          </a:rPr>
+                          <m:t>NaOH</m:t>
+                        </m:r>
+                      </m:den>
+                    </m:f>
+                  </m:oMath>
+                </a14:m>
+                <a:endParaRPr lang="en-US" sz="2200" dirty="0">
+                  <a:sym typeface="Wingdings" panose="05000000000000000000" pitchFamily="2" charset="2"/>
+                </a:endParaRPr>
+              </a:p>
+            </p:txBody>
+          </p:sp>
+        </mc:Choice>
+        <mc:Fallback xmlns="">
+          <p:sp>
+            <p:nvSpPr>
+              <p:cNvPr id="3" name="Content Placeholder 2">
+                <a:extLst>
+                  <a:ext uri="{FF2B5EF4-FFF2-40B4-BE49-F238E27FC236}">
+                    <a16:creationId xmlns:a16="http://schemas.microsoft.com/office/drawing/2014/main" id="{02559A82-C2B4-86C0-0491-F618E5CE6802}"/>
+                  </a:ext>
+                </a:extLst>
+              </p:cNvPr>
+              <p:cNvSpPr>
+                <a:spLocks noGrp="1" noRot="1" noChangeAspect="1" noMove="1" noResize="1" noEditPoints="1" noAdjustHandles="1" noChangeArrowheads="1" noChangeShapeType="1" noTextEdit="1"/>
+              </p:cNvSpPr>
+              <p:nvPr>
+                <p:ph idx="1"/>
+              </p:nvPr>
+            </p:nvSpPr>
+            <p:spPr>
+              <a:xfrm>
+                <a:off x="197224" y="1065312"/>
+                <a:ext cx="8562953" cy="5215465"/>
+              </a:xfrm>
+              <a:blipFill>
+                <a:blip r:embed="rId2"/>
+                <a:stretch>
+                  <a:fillRect l="-925" t="-819" b="-819"/>
+                </a:stretch>
+              </a:blipFill>
+            </p:spPr>
+            <p:txBody>
+              <a:bodyPr/>
+              <a:lstStyle/>
+              <a:p>
+                <a:r>
+                  <a:rPr lang="en-US">
+                    <a:noFill/>
+                  </a:rPr>
+                  <a:t> </a:t>
+                </a:r>
+              </a:p>
+            </p:txBody>
+          </p:sp>
+        </mc:Fallback>
+      </mc:AlternateContent>
+      <p:pic>
+        <p:nvPicPr>
+          <p:cNvPr id="11" name="Picture 10">
+            <a:extLst>
+              <a:ext uri="{FF2B5EF4-FFF2-40B4-BE49-F238E27FC236}">
+                <a16:creationId xmlns:a16="http://schemas.microsoft.com/office/drawing/2014/main" id="{3B11528C-8241-53E0-D49B-DB825076AB66}"/>
+              </a:ext>
+            </a:extLst>
+          </p:cNvPr>
+          <p:cNvPicPr>
+            <a:picLocks noChangeAspect="1"/>
+          </p:cNvPicPr>
+          <p:nvPr/>
+        </p:nvPicPr>
+        <p:blipFill>
+          <a:blip r:embed="rId3"/>
+          <a:stretch>
+            <a:fillRect/>
+          </a:stretch>
+        </p:blipFill>
+        <p:spPr>
+          <a:xfrm>
+            <a:off x="5187658" y="3268267"/>
+            <a:ext cx="3645765" cy="3275968"/>
+          </a:xfrm>
+          <a:prstGeom prst="rect">
+            <a:avLst/>
+          </a:prstGeom>
+        </p:spPr>
+      </p:pic>
+      <p:sp>
+        <p:nvSpPr>
+          <p:cNvPr id="12" name="Slide Number Placeholder 11">
+            <a:extLst>
+              <a:ext uri="{FF2B5EF4-FFF2-40B4-BE49-F238E27FC236}">
+                <a16:creationId xmlns:a16="http://schemas.microsoft.com/office/drawing/2014/main" id="{32B657E1-D4DC-F648-001C-C767545C8270}"/>
+              </a:ext>
+            </a:extLst>
+          </p:cNvPr>
+          <p:cNvSpPr>
+            <a:spLocks noGrp="1"/>
+          </p:cNvSpPr>
+          <p:nvPr>
+            <p:ph type="sldNum" sz="quarter" idx="10"/>
+          </p:nvPr>
+        </p:nvSpPr>
+        <p:spPr/>
+        <p:txBody>
+          <a:bodyPr/>
+          <a:lstStyle/>
+          <a:p>
+            <a:fld id="{DA7C98CF-2420-4B97-8881-079E520414F2}" type="slidenum">
+              <a:rPr lang="en-US" smtClean="0"/>
+              <a:pPr/>
+              <a:t>4</a:t>
+            </a:fld>
+            <a:endParaRPr lang="en-US" b="1" dirty="0"/>
+          </a:p>
+        </p:txBody>
+      </p:sp>
+    </p:spTree>
+    <p:extLst>
+      <p:ext uri="{BB962C8B-B14F-4D97-AF65-F5344CB8AC3E}">
+        <p14:creationId xmlns:p14="http://schemas.microsoft.com/office/powerpoint/2010/main" val="1537732845"/>
+      </p:ext>
+    </p:extLst>
+  </p:cSld>
+  <p:clrMapOvr>
+    <a:masterClrMapping/>
+  </p:clrMapOvr>
+</p:sld>
+</file>
+
+<file path=ppt/slides/slide5.xml><?xml version="1.0" encoding="utf-8"?>
+<p:sld xmlns:a="http://schemas.openxmlformats.org/drawingml/2006/main" xmlns:r="http://schemas.openxmlformats.org/officeDocument/2006/relationships" xmlns:p="http://schemas.openxmlformats.org/presentationml/2006/main">
+  <p:cSld>
+    <p:spTree>
+      <p:nvGrpSpPr>
+        <p:cNvPr id="1" name="">
+          <a:extLst>
+            <a:ext uri="{FF2B5EF4-FFF2-40B4-BE49-F238E27FC236}">
+              <a16:creationId xmlns:a16="http://schemas.microsoft.com/office/drawing/2014/main" id="{9CB08D30-17CF-11CC-706D-4DA009F59444}"/>
+            </a:ext>
+          </a:extLst>
+        </p:cNvPr>
+        <p:cNvGrpSpPr/>
+        <p:nvPr/>
+      </p:nvGrpSpPr>
+      <p:grpSpPr>
+        <a:xfrm>
+          <a:off x="0" y="0"/>
+          <a:ext cx="0" cy="0"/>
+          <a:chOff x="0" y="0"/>
+          <a:chExt cx="0" cy="0"/>
+        </a:xfrm>
+      </p:grpSpPr>
+      <p:sp>
+        <p:nvSpPr>
+          <p:cNvPr id="2" name="Title 1">
+            <a:extLst>
+              <a:ext uri="{FF2B5EF4-FFF2-40B4-BE49-F238E27FC236}">
+                <a16:creationId xmlns:a16="http://schemas.microsoft.com/office/drawing/2014/main" id="{D1241AC7-7E16-7BA0-C4EB-14CD2CBE5886}"/>
+              </a:ext>
+            </a:extLst>
+          </p:cNvPr>
+          <p:cNvSpPr>
+            <a:spLocks noGrp="1"/>
+          </p:cNvSpPr>
+          <p:nvPr>
+            <p:ph type="title"/>
+          </p:nvPr>
+        </p:nvSpPr>
+        <p:spPr>
+          <a:xfrm>
+            <a:off x="349956" y="234315"/>
+            <a:ext cx="8421512" cy="830997"/>
+          </a:xfrm>
+        </p:spPr>
+        <p:txBody>
+          <a:bodyPr/>
+          <a:lstStyle/>
+          <a:p>
+            <a:r>
+              <a:rPr lang="en-US" dirty="0"/>
+              <a:t>Background</a:t>
+            </a:r>
+          </a:p>
+        </p:txBody>
+      </p:sp>
+      <p:sp>
+        <p:nvSpPr>
+          <p:cNvPr id="3" name="Content Placeholder 2">
+            <a:extLst>
+              <a:ext uri="{FF2B5EF4-FFF2-40B4-BE49-F238E27FC236}">
+                <a16:creationId xmlns:a16="http://schemas.microsoft.com/office/drawing/2014/main" id="{BBC3C14A-90A5-7CCD-9652-EDA7DD59A49D}"/>
+              </a:ext>
+            </a:extLst>
+          </p:cNvPr>
+          <p:cNvSpPr>
+            <a:spLocks noGrp="1"/>
+          </p:cNvSpPr>
+          <p:nvPr>
+            <p:ph idx="1"/>
+          </p:nvPr>
+        </p:nvSpPr>
+        <p:spPr>
+          <a:xfrm>
+            <a:off x="349956" y="1065312"/>
+            <a:ext cx="8562953" cy="5478923"/>
+          </a:xfrm>
+        </p:spPr>
+        <p:txBody>
+          <a:bodyPr/>
+          <a:lstStyle/>
+          <a:p>
+            <a:r>
+              <a:rPr lang="en-US" sz="2200" dirty="0">
+                <a:sym typeface="Wingdings" panose="05000000000000000000" pitchFamily="2" charset="2"/>
+              </a:rPr>
+              <a:t>In order to titrate with </a:t>
+            </a:r>
+            <a:r>
+              <a:rPr lang="en-US" sz="2200" dirty="0">
+                <a:solidFill>
+                  <a:srgbClr val="FFFF00"/>
+                </a:solidFill>
+                <a:sym typeface="Wingdings" panose="05000000000000000000" pitchFamily="2" charset="2"/>
+              </a:rPr>
+              <a:t>NaOH</a:t>
+            </a:r>
+            <a:r>
+              <a:rPr lang="en-US" sz="2200" dirty="0">
+                <a:sym typeface="Wingdings" panose="05000000000000000000" pitchFamily="2" charset="2"/>
+              </a:rPr>
+              <a:t> to</a:t>
+            </a:r>
+            <a:br>
+              <a:rPr lang="en-US" sz="2200" dirty="0">
+                <a:sym typeface="Wingdings" panose="05000000000000000000" pitchFamily="2" charset="2"/>
+              </a:rPr>
+            </a:br>
+            <a:r>
+              <a:rPr lang="en-US" sz="2200" dirty="0">
+                <a:sym typeface="Wingdings" panose="05000000000000000000" pitchFamily="2" charset="2"/>
+              </a:rPr>
+              <a:t>determine </a:t>
+            </a:r>
+            <a:r>
+              <a:rPr lang="en-US" sz="2200" dirty="0">
+                <a:solidFill>
+                  <a:srgbClr val="FFFF00"/>
+                </a:solidFill>
+                <a:sym typeface="Wingdings" panose="05000000000000000000" pitchFamily="2" charset="2"/>
+              </a:rPr>
+              <a:t>citric acid</a:t>
+            </a:r>
+            <a:r>
+              <a:rPr lang="en-US" sz="2200" dirty="0">
+                <a:sym typeface="Wingdings" panose="05000000000000000000" pitchFamily="2" charset="2"/>
+              </a:rPr>
+              <a:t>, the</a:t>
+            </a:r>
+            <a:br>
+              <a:rPr lang="en-US" sz="2200" dirty="0">
+                <a:sym typeface="Wingdings" panose="05000000000000000000" pitchFamily="2" charset="2"/>
+              </a:rPr>
+            </a:br>
+            <a:r>
+              <a:rPr lang="en-US" sz="2200" dirty="0">
+                <a:sym typeface="Wingdings" panose="05000000000000000000" pitchFamily="2" charset="2"/>
+              </a:rPr>
+              <a:t>concentration of the titrant</a:t>
+            </a:r>
+            <a:br>
+              <a:rPr lang="en-US" sz="2200" dirty="0">
+                <a:sym typeface="Wingdings" panose="05000000000000000000" pitchFamily="2" charset="2"/>
+              </a:rPr>
+            </a:br>
+            <a:r>
+              <a:rPr lang="en-US" sz="2200" dirty="0">
+                <a:solidFill>
+                  <a:srgbClr val="FFFF00"/>
+                </a:solidFill>
+                <a:sym typeface="Wingdings" panose="05000000000000000000" pitchFamily="2" charset="2"/>
+              </a:rPr>
+              <a:t>NaOH</a:t>
+            </a:r>
+            <a:r>
+              <a:rPr lang="en-US" sz="2200" dirty="0">
+                <a:sym typeface="Wingdings" panose="05000000000000000000" pitchFamily="2" charset="2"/>
+              </a:rPr>
+              <a:t> must be known with</a:t>
+            </a:r>
+            <a:br>
+              <a:rPr lang="en-US" sz="2200" dirty="0">
+                <a:sym typeface="Wingdings" panose="05000000000000000000" pitchFamily="2" charset="2"/>
+              </a:rPr>
+            </a:br>
+            <a:r>
+              <a:rPr lang="en-US" sz="2200" dirty="0">
+                <a:sym typeface="Wingdings" panose="05000000000000000000" pitchFamily="2" charset="2"/>
+              </a:rPr>
+              <a:t>precision. And it is not known</a:t>
+            </a:r>
+            <a:br>
+              <a:rPr lang="en-US" sz="2200" dirty="0">
+                <a:sym typeface="Wingdings" panose="05000000000000000000" pitchFamily="2" charset="2"/>
+              </a:rPr>
+            </a:br>
+            <a:r>
+              <a:rPr lang="en-US" sz="2200" dirty="0">
+                <a:sym typeface="Wingdings" panose="05000000000000000000" pitchFamily="2" charset="2"/>
+              </a:rPr>
+              <a:t>except it is ~0.1 M, which means</a:t>
+            </a:r>
+            <a:br>
+              <a:rPr lang="en-US" sz="2200" dirty="0">
+                <a:sym typeface="Wingdings" panose="05000000000000000000" pitchFamily="2" charset="2"/>
+              </a:rPr>
+            </a:br>
+            <a:r>
+              <a:rPr lang="en-US" sz="2200" dirty="0">
+                <a:sym typeface="Wingdings" panose="05000000000000000000" pitchFamily="2" charset="2"/>
+              </a:rPr>
+              <a:t>“approximately 0.1 molar”</a:t>
+            </a:r>
+            <a:br>
+              <a:rPr lang="en-US" sz="2200" dirty="0">
+                <a:sym typeface="Wingdings" panose="05000000000000000000" pitchFamily="2" charset="2"/>
+              </a:rPr>
+            </a:br>
+            <a:r>
+              <a:rPr lang="en-US" sz="2200" dirty="0">
+                <a:sym typeface="Wingdings" panose="05000000000000000000" pitchFamily="2" charset="2"/>
+              </a:rPr>
+              <a:t>(moles per liter)</a:t>
+            </a:r>
+          </a:p>
+          <a:p>
+            <a:r>
+              <a:rPr lang="en-US" sz="2200" dirty="0">
+                <a:sym typeface="Wingdings" panose="05000000000000000000" pitchFamily="2" charset="2"/>
+              </a:rPr>
+              <a:t>So it is necessary first to </a:t>
+            </a:r>
+            <a:r>
+              <a:rPr lang="en-US" sz="2200" b="1" dirty="0">
+                <a:solidFill>
+                  <a:srgbClr val="00FF00"/>
+                </a:solidFill>
+                <a:sym typeface="Wingdings" panose="05000000000000000000" pitchFamily="2" charset="2"/>
+              </a:rPr>
+              <a:t>standardize</a:t>
+            </a:r>
+            <a:r>
+              <a:rPr lang="en-US" sz="2200" dirty="0">
+                <a:sym typeface="Wingdings" panose="05000000000000000000" pitchFamily="2" charset="2"/>
+              </a:rPr>
+              <a:t> the </a:t>
+            </a:r>
+            <a:r>
+              <a:rPr lang="en-US" sz="2200" dirty="0">
+                <a:solidFill>
+                  <a:srgbClr val="FFFF00"/>
+                </a:solidFill>
+                <a:sym typeface="Wingdings" panose="05000000000000000000" pitchFamily="2" charset="2"/>
+              </a:rPr>
+              <a:t>titrant</a:t>
+            </a:r>
+            <a:r>
+              <a:rPr lang="en-US" sz="2200" dirty="0">
+                <a:sym typeface="Wingdings" panose="05000000000000000000" pitchFamily="2" charset="2"/>
+              </a:rPr>
+              <a:t> </a:t>
+            </a:r>
+            <a:r>
+              <a:rPr lang="en-US" sz="2200" b="1" dirty="0">
+                <a:solidFill>
+                  <a:srgbClr val="FFC000"/>
+                </a:solidFill>
+                <a:sym typeface="Wingdings" panose="05000000000000000000" pitchFamily="2" charset="2"/>
+              </a:rPr>
+              <a:t>NaOH</a:t>
+            </a:r>
+            <a:r>
+              <a:rPr lang="en-US" sz="2200" dirty="0">
+                <a:sym typeface="Wingdings" panose="05000000000000000000" pitchFamily="2" charset="2"/>
+              </a:rPr>
+              <a:t> (it means, determine its exact concentration) using an analyte of known mass dissolved in water. This analyte is </a:t>
+            </a:r>
+            <a:r>
+              <a:rPr lang="en-US" sz="2200" dirty="0">
+                <a:solidFill>
+                  <a:schemeClr val="accent1">
+                    <a:lumMod val="60000"/>
+                    <a:lumOff val="40000"/>
+                  </a:schemeClr>
+                </a:solidFill>
+                <a:sym typeface="Wingdings" panose="05000000000000000000" pitchFamily="2" charset="2"/>
+              </a:rPr>
+              <a:t>oxalic acid </a:t>
+            </a:r>
+            <a:r>
+              <a:rPr lang="en-US" sz="2200" dirty="0">
+                <a:sym typeface="Wingdings" panose="05000000000000000000" pitchFamily="2" charset="2"/>
+              </a:rPr>
+              <a:t>(</a:t>
+            </a:r>
+            <a:r>
+              <a:rPr lang="en-US" sz="2200" b="1" dirty="0">
+                <a:solidFill>
+                  <a:srgbClr val="FFC000"/>
+                </a:solidFill>
+                <a:sym typeface="Wingdings" panose="05000000000000000000" pitchFamily="2" charset="2"/>
+              </a:rPr>
+              <a:t>HOOC-COOH</a:t>
+            </a:r>
+            <a:r>
+              <a:rPr lang="en-US" sz="2200" dirty="0">
+                <a:sym typeface="Wingdings" panose="05000000000000000000" pitchFamily="2" charset="2"/>
+              </a:rPr>
+              <a:t>). Oxalic acid is a weak acid like citric acid, but it has two acid groups and not three. So it takes two moles NaOH to </a:t>
+            </a:r>
+            <a:r>
+              <a:rPr lang="en-US" sz="2200" dirty="0">
+                <a:solidFill>
+                  <a:srgbClr val="FFFF00"/>
+                </a:solidFill>
+                <a:sym typeface="Wingdings" panose="05000000000000000000" pitchFamily="2" charset="2"/>
+              </a:rPr>
+              <a:t>neutralize</a:t>
+            </a:r>
+            <a:r>
+              <a:rPr lang="en-US" sz="2200" dirty="0">
+                <a:sym typeface="Wingdings" panose="05000000000000000000" pitchFamily="2" charset="2"/>
+              </a:rPr>
+              <a:t> oxalic acid and reach </a:t>
+            </a:r>
+            <a:r>
+              <a:rPr lang="en-US" sz="2200" dirty="0">
+                <a:solidFill>
+                  <a:schemeClr val="accent1">
+                    <a:lumMod val="60000"/>
+                    <a:lumOff val="40000"/>
+                  </a:schemeClr>
+                </a:solidFill>
+                <a:sym typeface="Wingdings" panose="05000000000000000000" pitchFamily="2" charset="2"/>
+              </a:rPr>
+              <a:t>equivalence point</a:t>
+            </a:r>
+            <a:r>
+              <a:rPr lang="en-US" sz="2200" dirty="0">
+                <a:sym typeface="Wingdings" panose="05000000000000000000" pitchFamily="2" charset="2"/>
+              </a:rPr>
+              <a:t>. At the equivalence point, </a:t>
+            </a:r>
+            <a:r>
+              <a:rPr lang="en-US" sz="2200" dirty="0">
+                <a:solidFill>
+                  <a:srgbClr val="FFFF00"/>
+                </a:solidFill>
+                <a:sym typeface="Wingdings" panose="05000000000000000000" pitchFamily="2" charset="2"/>
+              </a:rPr>
+              <a:t>pH</a:t>
+            </a:r>
+            <a:r>
+              <a:rPr lang="en-US" sz="2200" dirty="0">
+                <a:sym typeface="Wingdings" panose="05000000000000000000" pitchFamily="2" charset="2"/>
+              </a:rPr>
+              <a:t> </a:t>
+            </a:r>
+            <a:r>
+              <a:rPr lang="en-US" sz="2200" dirty="0">
+                <a:solidFill>
+                  <a:srgbClr val="FFFF00"/>
+                </a:solidFill>
+                <a:sym typeface="Wingdings" panose="05000000000000000000" pitchFamily="2" charset="2"/>
+              </a:rPr>
+              <a:t>indicator</a:t>
+            </a:r>
+            <a:r>
+              <a:rPr lang="en-US" sz="2200" dirty="0">
+                <a:sym typeface="Wingdings" panose="05000000000000000000" pitchFamily="2" charset="2"/>
+              </a:rPr>
+              <a:t> </a:t>
+            </a:r>
+            <a:r>
+              <a:rPr lang="en-US" sz="2200" dirty="0">
+                <a:solidFill>
+                  <a:schemeClr val="accent1">
+                    <a:lumMod val="60000"/>
+                    <a:lumOff val="40000"/>
+                  </a:schemeClr>
+                </a:solidFill>
+                <a:sym typeface="Wingdings" panose="05000000000000000000" pitchFamily="2" charset="2"/>
+              </a:rPr>
+              <a:t>phenolphthalein</a:t>
+            </a:r>
+            <a:r>
+              <a:rPr lang="en-US" sz="2200" dirty="0">
+                <a:sym typeface="Wingdings" panose="05000000000000000000" pitchFamily="2" charset="2"/>
+              </a:rPr>
+              <a:t> will go from colorless to </a:t>
+            </a:r>
+            <a:r>
+              <a:rPr lang="en-US" sz="2200" b="1" dirty="0">
+                <a:solidFill>
+                  <a:srgbClr val="FF66FF"/>
+                </a:solidFill>
+                <a:sym typeface="Wingdings" panose="05000000000000000000" pitchFamily="2" charset="2"/>
+              </a:rPr>
+              <a:t>pink</a:t>
+            </a:r>
+            <a:r>
+              <a:rPr lang="en-US" sz="2200" dirty="0">
+                <a:sym typeface="Wingdings" panose="05000000000000000000" pitchFamily="2" charset="2"/>
+              </a:rPr>
+              <a:t> </a:t>
+            </a:r>
+          </a:p>
+        </p:txBody>
+      </p:sp>
+      <p:pic>
+        <p:nvPicPr>
+          <p:cNvPr id="7" name="Picture 6">
+            <a:extLst>
+              <a:ext uri="{FF2B5EF4-FFF2-40B4-BE49-F238E27FC236}">
+                <a16:creationId xmlns:a16="http://schemas.microsoft.com/office/drawing/2014/main" id="{AA2E0B2A-D3BF-0976-9D8C-158B2F28CA8B}"/>
+              </a:ext>
+            </a:extLst>
+          </p:cNvPr>
+          <p:cNvPicPr>
+            <a:picLocks noChangeAspect="1"/>
+          </p:cNvPicPr>
+          <p:nvPr/>
+        </p:nvPicPr>
+        <p:blipFill>
+          <a:blip r:embed="rId2"/>
+          <a:stretch>
+            <a:fillRect/>
+          </a:stretch>
+        </p:blipFill>
+        <p:spPr>
+          <a:xfrm>
+            <a:off x="5360893" y="981884"/>
+            <a:ext cx="3617176" cy="2297259"/>
+          </a:xfrm>
+          <a:prstGeom prst="rect">
+            <a:avLst/>
+          </a:prstGeom>
+        </p:spPr>
+      </p:pic>
+      <p:sp>
+        <p:nvSpPr>
+          <p:cNvPr id="8" name="Slide Number Placeholder 7">
+            <a:extLst>
+              <a:ext uri="{FF2B5EF4-FFF2-40B4-BE49-F238E27FC236}">
+                <a16:creationId xmlns:a16="http://schemas.microsoft.com/office/drawing/2014/main" id="{D039E166-4978-4C15-B799-ED17F57EF57C}"/>
+              </a:ext>
+            </a:extLst>
+          </p:cNvPr>
+          <p:cNvSpPr>
+            <a:spLocks noGrp="1"/>
+          </p:cNvSpPr>
+          <p:nvPr>
+            <p:ph type="sldNum" sz="quarter" idx="10"/>
+          </p:nvPr>
+        </p:nvSpPr>
+        <p:spPr/>
+        <p:txBody>
+          <a:bodyPr/>
+          <a:lstStyle/>
+          <a:p>
+            <a:fld id="{DA7C98CF-2420-4B97-8881-079E520414F2}" type="slidenum">
+              <a:rPr lang="en-US" smtClean="0"/>
+              <a:pPr/>
+              <a:t>5</a:t>
+            </a:fld>
+            <a:endParaRPr lang="en-US" b="1" dirty="0"/>
+          </a:p>
+        </p:txBody>
+      </p:sp>
+    </p:spTree>
+    <p:extLst>
+      <p:ext uri="{BB962C8B-B14F-4D97-AF65-F5344CB8AC3E}">
+        <p14:creationId xmlns:p14="http://schemas.microsoft.com/office/powerpoint/2010/main" val="1081964028"/>
+      </p:ext>
+    </p:extLst>
+  </p:cSld>
+  <p:clrMapOvr>
+    <a:masterClrMapping/>
+  </p:clrMapOvr>
+</p:sld>
+</file>
+
+<file path=ppt/slides/slide6.xml><?xml version="1.0" encoding="utf-8"?>
 <p:sld xmlns:a="http://schemas.openxmlformats.org/drawingml/2006/main" xmlns:r="http://schemas.openxmlformats.org/officeDocument/2006/relationships" xmlns:p="http://schemas.openxmlformats.org/presentationml/2006/main">
   <p:cSld>
     <p:spTree>
@@ -11525,8 +14034,52 @@
           <a:p>
             <a:r>
               <a:rPr lang="en-US" dirty="0"/>
-              <a:t>Small volumes (aliquots) </a:t>
-            </a:r>
+              <a:t>Small volumes (aliquots) of titrant will be delivered from a </a:t>
+            </a:r>
+            <a:r>
+              <a:rPr lang="en-US" dirty="0" err="1"/>
+              <a:t>buret</a:t>
+            </a:r>
+            <a:r>
+              <a:rPr lang="en-US" dirty="0"/>
+              <a:t> controlling its stopcock to deliver a precise total volume that is the equivalence point of the neutralization of all the protons of the acid with the hydroxyl of the base.</a:t>
+            </a:r>
+          </a:p>
+          <a:p>
+            <a:r>
+              <a:rPr lang="en-US" dirty="0"/>
+              <a:t>It will be necessary to drop titrant directly in the solution (not along walls of flask) and swirl with each drop or aliquot to ensure mixing and persistence of indicator color.</a:t>
+            </a:r>
+          </a:p>
+        </p:txBody>
+      </p:sp>
+      <p:sp>
+        <p:nvSpPr>
+          <p:cNvPr id="4" name="Slide Number Placeholder 3">
+            <a:extLst>
+              <a:ext uri="{FF2B5EF4-FFF2-40B4-BE49-F238E27FC236}">
+                <a16:creationId xmlns:a16="http://schemas.microsoft.com/office/drawing/2014/main" id="{E5C1E12E-A73F-B89D-F2C2-70E574638E37}"/>
+              </a:ext>
+            </a:extLst>
+          </p:cNvPr>
+          <p:cNvSpPr>
+            <a:spLocks noGrp="1"/>
+          </p:cNvSpPr>
+          <p:nvPr>
+            <p:ph type="sldNum" sz="quarter" idx="10"/>
+          </p:nvPr>
+        </p:nvSpPr>
+        <p:spPr/>
+        <p:txBody>
+          <a:bodyPr/>
+          <a:lstStyle/>
+          <a:p>
+            <a:fld id="{DA7C98CF-2420-4B97-8881-079E520414F2}" type="slidenum">
+              <a:rPr lang="en-US" smtClean="0"/>
+              <a:pPr/>
+              <a:t>6</a:t>
+            </a:fld>
+            <a:endParaRPr lang="en-US" b="1" dirty="0"/>
           </a:p>
         </p:txBody>
       </p:sp>
@@ -11543,7 +14096,7 @@
 </p:sld>
 </file>
 
-<file path=ppt/slides/slide4.xml><?xml version="1.0" encoding="utf-8"?>
+<file path=ppt/slides/slide7.xml><?xml version="1.0" encoding="utf-8"?>
 <p:sld xmlns:a="http://schemas.openxmlformats.org/drawingml/2006/main" xmlns:r="http://schemas.openxmlformats.org/officeDocument/2006/relationships" xmlns:p="http://schemas.openxmlformats.org/presentationml/2006/main">
   <p:cSld>
     <p:spTree>
@@ -11714,6 +14267,36 @@
           </a:prstGeom>
         </p:spPr>
       </p:pic>
+      <p:sp>
+        <p:nvSpPr>
+          <p:cNvPr id="3" name="Slide Number Placeholder 2">
+            <a:extLst>
+              <a:ext uri="{FF2B5EF4-FFF2-40B4-BE49-F238E27FC236}">
+                <a16:creationId xmlns:a16="http://schemas.microsoft.com/office/drawing/2014/main" id="{7EEC9B8E-40AD-9516-A380-7FA75139E2B5}"/>
+              </a:ext>
+            </a:extLst>
+          </p:cNvPr>
+          <p:cNvSpPr>
+            <a:spLocks noGrp="1"/>
+          </p:cNvSpPr>
+          <p:nvPr>
+            <p:ph type="sldNum" sz="quarter" idx="10"/>
+          </p:nvPr>
+        </p:nvSpPr>
+        <p:spPr/>
+        <p:txBody>
+          <a:bodyPr/>
+          <a:lstStyle/>
+          <a:p>
+            <a:fld id="{DA7C98CF-2420-4B97-8881-079E520414F2}" type="slidenum">
+              <a:rPr lang="en-US" smtClean="0"/>
+              <a:pPr/>
+              <a:t>7</a:t>
+            </a:fld>
+            <a:endParaRPr lang="en-US" b="1" dirty="0"/>
+          </a:p>
+        </p:txBody>
+      </p:sp>
     </p:spTree>
     <p:extLst>
       <p:ext uri="{BB962C8B-B14F-4D97-AF65-F5344CB8AC3E}">
@@ -11727,7 +14310,7 @@
 </p:sld>
 </file>
 
-<file path=ppt/slides/slide5.xml><?xml version="1.0" encoding="utf-8"?>
+<file path=ppt/slides/slide8.xml><?xml version="1.0" encoding="utf-8"?>
 <p:sld xmlns:a="http://schemas.openxmlformats.org/drawingml/2006/main" xmlns:r="http://schemas.openxmlformats.org/officeDocument/2006/relationships" xmlns:p="http://schemas.openxmlformats.org/presentationml/2006/main">
   <p:cSld>
     <p:spTree>
@@ -11808,6 +14391,36 @@
           </a:p>
         </p:txBody>
       </p:sp>
+      <p:sp>
+        <p:nvSpPr>
+          <p:cNvPr id="3" name="Slide Number Placeholder 2">
+            <a:extLst>
+              <a:ext uri="{FF2B5EF4-FFF2-40B4-BE49-F238E27FC236}">
+                <a16:creationId xmlns:a16="http://schemas.microsoft.com/office/drawing/2014/main" id="{E1A4BDE4-6DD4-F89F-1D61-D0C2AA76D1CC}"/>
+              </a:ext>
+            </a:extLst>
+          </p:cNvPr>
+          <p:cNvSpPr>
+            <a:spLocks noGrp="1"/>
+          </p:cNvSpPr>
+          <p:nvPr>
+            <p:ph type="sldNum" sz="quarter" idx="10"/>
+          </p:nvPr>
+        </p:nvSpPr>
+        <p:spPr/>
+        <p:txBody>
+          <a:bodyPr/>
+          <a:lstStyle/>
+          <a:p>
+            <a:fld id="{DA7C98CF-2420-4B97-8881-079E520414F2}" type="slidenum">
+              <a:rPr lang="en-US" smtClean="0"/>
+              <a:pPr/>
+              <a:t>8</a:t>
+            </a:fld>
+            <a:endParaRPr lang="en-US" b="1" dirty="0"/>
+          </a:p>
+        </p:txBody>
+      </p:sp>
     </p:spTree>
     <p:extLst>
       <p:ext uri="{BB962C8B-B14F-4D97-AF65-F5344CB8AC3E}">
@@ -11821,7 +14434,7 @@
 </p:sld>
 </file>
 
-<file path=ppt/slides/slide6.xml><?xml version="1.0" encoding="utf-8"?>
+<file path=ppt/slides/slide9.xml><?xml version="1.0" encoding="utf-8"?>
 <p:sld xmlns:a="http://schemas.openxmlformats.org/drawingml/2006/main" xmlns:r="http://schemas.openxmlformats.org/officeDocument/2006/relationships" xmlns:p="http://schemas.openxmlformats.org/presentationml/2006/main">
   <p:cSld>
     <p:spTree>
@@ -11946,48 +14559,12 @@
           </a:p>
         </p:txBody>
       </p:sp>
-    </p:spTree>
-    <p:extLst>
-      <p:ext uri="{BB962C8B-B14F-4D97-AF65-F5344CB8AC3E}">
-        <p14:creationId xmlns:p14="http://schemas.microsoft.com/office/powerpoint/2010/main" val="3952654810"/>
-      </p:ext>
-    </p:extLst>
-  </p:cSld>
-  <p:clrMapOvr>
-    <a:masterClrMapping/>
-  </p:clrMapOvr>
-</p:sld>
-</file>
-
-<file path=ppt/slides/slide7.xml><?xml version="1.0" encoding="utf-8"?>
-<p:sld xmlns:a="http://schemas.openxmlformats.org/drawingml/2006/main" xmlns:r="http://schemas.openxmlformats.org/officeDocument/2006/relationships" xmlns:p="http://schemas.openxmlformats.org/presentationml/2006/main">
-  <p:cSld>
-    <p:spTree>
-      <p:nvGrpSpPr>
-        <p:cNvPr id="1" name="">
-          <a:extLst>
-            <a:ext uri="{FF2B5EF4-FFF2-40B4-BE49-F238E27FC236}">
-              <a16:creationId xmlns:a16="http://schemas.microsoft.com/office/drawing/2014/main" id="{49CD2643-DD36-56C5-8BE8-01182BD156D7}"/>
-            </a:ext>
-          </a:extLst>
-        </p:cNvPr>
-        <p:cNvGrpSpPr/>
-        <p:nvPr/>
-      </p:nvGrpSpPr>
-      <p:grpSpPr>
-        <a:xfrm>
-          <a:off x="0" y="0"/>
-          <a:ext cx="0" cy="0"/>
-          <a:chOff x="0" y="0"/>
-          <a:chExt cx="0" cy="0"/>
-        </a:xfrm>
-      </p:grpSpPr>
       <p:sp>
         <p:nvSpPr>
-          <p:cNvPr id="2" name="Title 1">
+          <p:cNvPr id="3" name="Slide Number Placeholder 2">
             <a:extLst>
               <a:ext uri="{FF2B5EF4-FFF2-40B4-BE49-F238E27FC236}">
-                <a16:creationId xmlns:a16="http://schemas.microsoft.com/office/drawing/2014/main" id="{C9B2387C-524E-72F4-EB6F-E149226C8A92}"/>
+                <a16:creationId xmlns:a16="http://schemas.microsoft.com/office/drawing/2014/main" id="{6A044DAF-721B-36D7-EC38-16B3C4620F55}"/>
               </a:ext>
             </a:extLst>
           </p:cNvPr>
@@ -11995,522 +14572,27 @@
             <a:spLocks noGrp="1"/>
           </p:cNvSpPr>
           <p:nvPr>
-            <p:ph type="title"/>
+            <p:ph type="sldNum" sz="quarter" idx="10"/>
           </p:nvPr>
         </p:nvSpPr>
-        <p:spPr>
-          <a:xfrm>
-            <a:off x="338666" y="183025"/>
-            <a:ext cx="8421512" cy="769441"/>
-          </a:xfrm>
-        </p:spPr>
+        <p:spPr/>
         <p:txBody>
           <a:bodyPr/>
           <a:lstStyle/>
           <a:p>
-            <a:r>
-              <a:rPr lang="en-US" sz="4400" dirty="0"/>
-              <a:t>Procedure</a:t>
-            </a:r>
-          </a:p>
-        </p:txBody>
-      </p:sp>
-      <p:sp>
-        <p:nvSpPr>
-          <p:cNvPr id="6" name="Content Placeholder 5">
-            <a:extLst>
-              <a:ext uri="{FF2B5EF4-FFF2-40B4-BE49-F238E27FC236}">
-                <a16:creationId xmlns:a16="http://schemas.microsoft.com/office/drawing/2014/main" id="{0B14C9E4-E27D-6C8A-FF93-80BD89128698}"/>
-              </a:ext>
-            </a:extLst>
-          </p:cNvPr>
-          <p:cNvSpPr>
-            <a:spLocks noGrp="1"/>
-          </p:cNvSpPr>
-          <p:nvPr>
-            <p:ph idx="1"/>
-          </p:nvPr>
-        </p:nvSpPr>
-        <p:spPr>
-          <a:xfrm>
-            <a:off x="372533" y="952466"/>
-            <a:ext cx="8387645" cy="5595089"/>
-          </a:xfrm>
-        </p:spPr>
-        <p:txBody>
-          <a:bodyPr/>
-          <a:lstStyle/>
-          <a:p>
-            <a:pPr marL="0" indent="0">
-              <a:buNone/>
-            </a:pPr>
-            <a:r>
-              <a:rPr lang="en-US" i="1" dirty="0">
-                <a:solidFill>
-                  <a:srgbClr val="00FF00"/>
-                </a:solidFill>
-              </a:rPr>
-              <a:t>Preparing the </a:t>
-            </a:r>
-            <a:r>
-              <a:rPr lang="en-US" i="1" dirty="0" err="1">
-                <a:solidFill>
-                  <a:srgbClr val="00FF00"/>
-                </a:solidFill>
-              </a:rPr>
-              <a:t>buret</a:t>
-            </a:r>
-            <a:endParaRPr lang="en-US" i="1" dirty="0">
-              <a:solidFill>
-                <a:srgbClr val="00FF00"/>
-              </a:solidFill>
-            </a:endParaRPr>
-          </a:p>
-          <a:p>
-            <a:pPr marL="457200" indent="-457200">
-              <a:buFont typeface="+mj-lt"/>
-              <a:buAutoNum type="arabicPeriod"/>
-            </a:pPr>
-            <a:r>
-              <a:rPr lang="en-US" dirty="0"/>
-              <a:t>Rinse the </a:t>
-            </a:r>
-            <a:r>
-              <a:rPr lang="en-US" dirty="0" err="1"/>
-              <a:t>buret</a:t>
-            </a:r>
-            <a:r>
-              <a:rPr lang="en-US" dirty="0"/>
-              <a:t> with 5 mL DI water three times (turn </a:t>
-            </a:r>
-            <a:r>
-              <a:rPr lang="en-US" dirty="0" err="1"/>
-              <a:t>buret</a:t>
-            </a:r>
-            <a:r>
-              <a:rPr lang="en-US" dirty="0"/>
-              <a:t> on side and rotate it). Collect the rinse in a large waste beaker.</a:t>
-            </a:r>
-          </a:p>
-          <a:p>
-            <a:pPr marL="457200" indent="-457200">
-              <a:buFont typeface="+mj-lt"/>
-              <a:buAutoNum type="arabicPeriod"/>
-            </a:pPr>
-            <a:r>
-              <a:rPr lang="en-US" dirty="0"/>
-              <a:t>Repeat rinsing but with 5 mL of the titrant NaOH solution</a:t>
-            </a:r>
-          </a:p>
-          <a:p>
-            <a:pPr marL="457200" indent="-457200">
-              <a:buFont typeface="+mj-lt"/>
-              <a:buAutoNum type="arabicPeriod"/>
-            </a:pPr>
-            <a:r>
-              <a:rPr lang="en-US" dirty="0"/>
-              <a:t>Clamp the </a:t>
-            </a:r>
-            <a:r>
-              <a:rPr lang="en-US" dirty="0" err="1"/>
-              <a:t>buret</a:t>
-            </a:r>
-            <a:r>
-              <a:rPr lang="en-US" dirty="0"/>
-              <a:t> to the stand and with the waste beaker under it and stopcock open, add several mL to </a:t>
-            </a:r>
-            <a:r>
-              <a:rPr lang="en-US" dirty="0" err="1"/>
-              <a:t>buret</a:t>
-            </a:r>
-            <a:r>
-              <a:rPr lang="en-US" dirty="0"/>
-              <a:t>. As it flows, close stopcock. Ensure flow has filled </a:t>
-            </a:r>
-            <a:r>
-              <a:rPr lang="en-US" dirty="0" err="1"/>
-              <a:t>buret</a:t>
-            </a:r>
-            <a:r>
-              <a:rPr lang="en-US" dirty="0"/>
-              <a:t> tip</a:t>
-            </a:r>
+            <a:fld id="{DA7C98CF-2420-4B97-8881-079E520414F2}" type="slidenum">
+              <a:rPr lang="en-US" smtClean="0"/>
+              <a:pPr/>
+              <a:t>9</a:t>
+            </a:fld>
+            <a:endParaRPr lang="en-US" b="1" dirty="0"/>
           </a:p>
         </p:txBody>
       </p:sp>
     </p:spTree>
     <p:extLst>
       <p:ext uri="{BB962C8B-B14F-4D97-AF65-F5344CB8AC3E}">
-        <p14:creationId xmlns:p14="http://schemas.microsoft.com/office/powerpoint/2010/main" val="206461902"/>
-      </p:ext>
-    </p:extLst>
-  </p:cSld>
-  <p:clrMapOvr>
-    <a:masterClrMapping/>
-  </p:clrMapOvr>
-</p:sld>
-</file>
-
-<file path=ppt/slides/slide8.xml><?xml version="1.0" encoding="utf-8"?>
-<p:sld xmlns:a="http://schemas.openxmlformats.org/drawingml/2006/main" xmlns:r="http://schemas.openxmlformats.org/officeDocument/2006/relationships" xmlns:p="http://schemas.openxmlformats.org/presentationml/2006/main">
-  <p:cSld>
-    <p:spTree>
-      <p:nvGrpSpPr>
-        <p:cNvPr id="1" name="">
-          <a:extLst>
-            <a:ext uri="{FF2B5EF4-FFF2-40B4-BE49-F238E27FC236}">
-              <a16:creationId xmlns:a16="http://schemas.microsoft.com/office/drawing/2014/main" id="{FE87709A-8175-FF7F-0231-BB8E55FD5510}"/>
-            </a:ext>
-          </a:extLst>
-        </p:cNvPr>
-        <p:cNvGrpSpPr/>
-        <p:nvPr/>
-      </p:nvGrpSpPr>
-      <p:grpSpPr>
-        <a:xfrm>
-          <a:off x="0" y="0"/>
-          <a:ext cx="0" cy="0"/>
-          <a:chOff x="0" y="0"/>
-          <a:chExt cx="0" cy="0"/>
-        </a:xfrm>
-      </p:grpSpPr>
-      <p:sp>
-        <p:nvSpPr>
-          <p:cNvPr id="2" name="Title 1">
-            <a:extLst>
-              <a:ext uri="{FF2B5EF4-FFF2-40B4-BE49-F238E27FC236}">
-                <a16:creationId xmlns:a16="http://schemas.microsoft.com/office/drawing/2014/main" id="{AC077271-3009-4152-9A13-701D524303F5}"/>
-              </a:ext>
-            </a:extLst>
-          </p:cNvPr>
-          <p:cNvSpPr>
-            <a:spLocks noGrp="1"/>
-          </p:cNvSpPr>
-          <p:nvPr>
-            <p:ph type="title"/>
-          </p:nvPr>
-        </p:nvSpPr>
-        <p:spPr>
-          <a:xfrm>
-            <a:off x="338666" y="183025"/>
-            <a:ext cx="8421512" cy="769441"/>
-          </a:xfrm>
-        </p:spPr>
-        <p:txBody>
-          <a:bodyPr/>
-          <a:lstStyle/>
-          <a:p>
-            <a:r>
-              <a:rPr lang="en-US" sz="4400" dirty="0"/>
-              <a:t>Procedure</a:t>
-            </a:r>
-          </a:p>
-        </p:txBody>
-      </p:sp>
-      <p:sp>
-        <p:nvSpPr>
-          <p:cNvPr id="6" name="Content Placeholder 5">
-            <a:extLst>
-              <a:ext uri="{FF2B5EF4-FFF2-40B4-BE49-F238E27FC236}">
-                <a16:creationId xmlns:a16="http://schemas.microsoft.com/office/drawing/2014/main" id="{407D3CAC-588F-B250-8F8D-44662EA2D80D}"/>
-              </a:ext>
-            </a:extLst>
-          </p:cNvPr>
-          <p:cNvSpPr>
-            <a:spLocks noGrp="1"/>
-          </p:cNvSpPr>
-          <p:nvPr>
-            <p:ph idx="1"/>
-          </p:nvPr>
-        </p:nvSpPr>
-        <p:spPr>
-          <a:xfrm>
-            <a:off x="372533" y="952466"/>
-            <a:ext cx="8387645" cy="5595089"/>
-          </a:xfrm>
-        </p:spPr>
-        <p:txBody>
-          <a:bodyPr/>
-          <a:lstStyle/>
-          <a:p>
-            <a:pPr marL="0" indent="0">
-              <a:buNone/>
-            </a:pPr>
-            <a:r>
-              <a:rPr lang="en-US" i="1" dirty="0">
-                <a:solidFill>
-                  <a:srgbClr val="00FF00"/>
-                </a:solidFill>
-              </a:rPr>
-              <a:t>Part I-Standardization</a:t>
-            </a:r>
-          </a:p>
-          <a:p>
-            <a:pPr marL="457200" indent="-457200">
-              <a:buFont typeface="+mj-lt"/>
-              <a:buAutoNum type="arabicPeriod" startAt="4"/>
-            </a:pPr>
-            <a:r>
-              <a:rPr lang="en-US" dirty="0"/>
-              <a:t>Fill </a:t>
-            </a:r>
-            <a:r>
-              <a:rPr lang="en-US" dirty="0" err="1"/>
-              <a:t>buret</a:t>
-            </a:r>
-            <a:r>
-              <a:rPr lang="en-US" dirty="0"/>
-              <a:t> with ~0.1 M NaOH titrant between the 0 and 3 mL mark</a:t>
-            </a:r>
-          </a:p>
-          <a:p>
-            <a:pPr marL="457200" indent="-457200">
-              <a:buFont typeface="+mj-lt"/>
-              <a:buAutoNum type="arabicPeriod" startAt="4"/>
-            </a:pPr>
-            <a:r>
-              <a:rPr lang="en-US" dirty="0"/>
-              <a:t>Record initial </a:t>
-            </a:r>
-            <a:r>
-              <a:rPr lang="en-US" dirty="0" err="1"/>
-              <a:t>buret</a:t>
-            </a:r>
-            <a:r>
-              <a:rPr lang="en-US" dirty="0"/>
-              <a:t> reading to correct precision: if the smallest division mark is 0.1 mL, then the precision should be ±0.01 mL</a:t>
-            </a:r>
-          </a:p>
-          <a:p>
-            <a:pPr marL="457200" indent="-457200">
-              <a:buFont typeface="+mj-lt"/>
-              <a:buAutoNum type="arabicPeriod" startAt="4"/>
-            </a:pPr>
-            <a:r>
-              <a:rPr lang="en-US" dirty="0"/>
-              <a:t>Oxalic acid</a:t>
-            </a:r>
-          </a:p>
-          <a:p>
-            <a:pPr marL="693738" lvl="1" indent="-457200">
-              <a:buFont typeface="+mj-lt"/>
-              <a:buAutoNum type="alphaLcParenR"/>
-            </a:pPr>
-            <a:r>
-              <a:rPr lang="en-US" dirty="0"/>
-              <a:t>Put glassine weigh paper on balance and tare (zero)</a:t>
-            </a:r>
-          </a:p>
-          <a:p>
-            <a:pPr marL="693738" lvl="1" indent="-457200">
-              <a:buFont typeface="+mj-lt"/>
-              <a:buAutoNum type="alphaLcParenR"/>
-            </a:pPr>
-            <a:r>
-              <a:rPr lang="en-US" dirty="0"/>
-              <a:t>Spoon out between 0.1000 and 0.1200 g oxalic acid dihydrate and record mass</a:t>
-            </a:r>
-          </a:p>
-          <a:p>
-            <a:pPr marL="693738" lvl="1" indent="-457200">
-              <a:buFont typeface="+mj-lt"/>
-              <a:buAutoNum type="alphaLcParenR"/>
-            </a:pPr>
-            <a:r>
-              <a:rPr lang="en-US" dirty="0"/>
-              <a:t>Transfer the acid completely without spilling into flask</a:t>
-            </a:r>
-          </a:p>
-          <a:p>
-            <a:pPr marL="457200" indent="-457200">
-              <a:buFont typeface="+mj-lt"/>
-              <a:buAutoNum type="arabicPeriod" startAt="4"/>
-            </a:pPr>
-            <a:r>
-              <a:rPr lang="en-US" dirty="0"/>
-              <a:t>Add about 10 mL DI-water in 10 mL graduated cylinder to the flask with acid, swirl to dissolve</a:t>
-            </a:r>
-          </a:p>
-          <a:p>
-            <a:pPr marL="457200" indent="-457200">
-              <a:buFont typeface="+mj-lt"/>
-              <a:buAutoNum type="arabicPeriod" startAt="4"/>
-            </a:pPr>
-            <a:r>
-              <a:rPr lang="en-US" dirty="0"/>
-              <a:t>Add 2-3 drops phenolphthalein to flask</a:t>
-            </a:r>
-          </a:p>
-        </p:txBody>
-      </p:sp>
-    </p:spTree>
-    <p:extLst>
-      <p:ext uri="{BB962C8B-B14F-4D97-AF65-F5344CB8AC3E}">
-        <p14:creationId xmlns:p14="http://schemas.microsoft.com/office/powerpoint/2010/main" val="2345466595"/>
-      </p:ext>
-    </p:extLst>
-  </p:cSld>
-  <p:clrMapOvr>
-    <a:masterClrMapping/>
-  </p:clrMapOvr>
-</p:sld>
-</file>
-
-<file path=ppt/slides/slide9.xml><?xml version="1.0" encoding="utf-8"?>
-<p:sld xmlns:a="http://schemas.openxmlformats.org/drawingml/2006/main" xmlns:r="http://schemas.openxmlformats.org/officeDocument/2006/relationships" xmlns:p="http://schemas.openxmlformats.org/presentationml/2006/main">
-  <p:cSld>
-    <p:spTree>
-      <p:nvGrpSpPr>
-        <p:cNvPr id="1" name="">
-          <a:extLst>
-            <a:ext uri="{FF2B5EF4-FFF2-40B4-BE49-F238E27FC236}">
-              <a16:creationId xmlns:a16="http://schemas.microsoft.com/office/drawing/2014/main" id="{A45982F0-6FEF-1DD5-8F88-C3CA74DD97C4}"/>
-            </a:ext>
-          </a:extLst>
-        </p:cNvPr>
-        <p:cNvGrpSpPr/>
-        <p:nvPr/>
-      </p:nvGrpSpPr>
-      <p:grpSpPr>
-        <a:xfrm>
-          <a:off x="0" y="0"/>
-          <a:ext cx="0" cy="0"/>
-          <a:chOff x="0" y="0"/>
-          <a:chExt cx="0" cy="0"/>
-        </a:xfrm>
-      </p:grpSpPr>
-      <p:sp>
-        <p:nvSpPr>
-          <p:cNvPr id="2" name="Title 1">
-            <a:extLst>
-              <a:ext uri="{FF2B5EF4-FFF2-40B4-BE49-F238E27FC236}">
-                <a16:creationId xmlns:a16="http://schemas.microsoft.com/office/drawing/2014/main" id="{B6123A48-8261-7B51-CD72-8E2B8E465E2D}"/>
-              </a:ext>
-            </a:extLst>
-          </p:cNvPr>
-          <p:cNvSpPr>
-            <a:spLocks noGrp="1"/>
-          </p:cNvSpPr>
-          <p:nvPr>
-            <p:ph type="title"/>
-          </p:nvPr>
-        </p:nvSpPr>
-        <p:spPr>
-          <a:xfrm>
-            <a:off x="338666" y="183025"/>
-            <a:ext cx="8421512" cy="769441"/>
-          </a:xfrm>
-        </p:spPr>
-        <p:txBody>
-          <a:bodyPr/>
-          <a:lstStyle/>
-          <a:p>
-            <a:r>
-              <a:rPr lang="en-US" sz="4400" dirty="0"/>
-              <a:t>Procedure</a:t>
-            </a:r>
-          </a:p>
-        </p:txBody>
-      </p:sp>
-      <p:sp>
-        <p:nvSpPr>
-          <p:cNvPr id="6" name="Content Placeholder 5">
-            <a:extLst>
-              <a:ext uri="{FF2B5EF4-FFF2-40B4-BE49-F238E27FC236}">
-                <a16:creationId xmlns:a16="http://schemas.microsoft.com/office/drawing/2014/main" id="{A67DC92C-FB76-2CC9-FEBE-8BF998CE76C3}"/>
-              </a:ext>
-            </a:extLst>
-          </p:cNvPr>
-          <p:cNvSpPr>
-            <a:spLocks noGrp="1"/>
-          </p:cNvSpPr>
-          <p:nvPr>
-            <p:ph idx="1"/>
-          </p:nvPr>
-        </p:nvSpPr>
-        <p:spPr>
-          <a:xfrm>
-            <a:off x="372533" y="952466"/>
-            <a:ext cx="8387645" cy="5595089"/>
-          </a:xfrm>
-        </p:spPr>
-        <p:txBody>
-          <a:bodyPr/>
-          <a:lstStyle/>
-          <a:p>
-            <a:pPr marL="0" indent="0">
-              <a:buNone/>
-            </a:pPr>
-            <a:r>
-              <a:rPr lang="en-US" i="1" dirty="0">
-                <a:solidFill>
-                  <a:srgbClr val="00FF00"/>
-                </a:solidFill>
-              </a:rPr>
-              <a:t>Part I-Standardization</a:t>
-            </a:r>
-          </a:p>
-          <a:p>
-            <a:pPr marL="457200" indent="-457200">
-              <a:buFont typeface="+mj-lt"/>
-              <a:buAutoNum type="arabicPeriod" startAt="9"/>
-            </a:pPr>
-            <a:r>
-              <a:rPr lang="en-US" dirty="0"/>
-              <a:t>Place piece of white paper under flask to observe any color change</a:t>
-            </a:r>
-          </a:p>
-          <a:p>
-            <a:pPr marL="457200" indent="-457200">
-              <a:buFont typeface="+mj-lt"/>
-              <a:buAutoNum type="arabicPeriod" startAt="9"/>
-            </a:pPr>
-            <a:r>
-              <a:rPr lang="en-US" dirty="0"/>
-              <a:t> Swirl flask and quickly add 10 mL NaOH from </a:t>
-            </a:r>
-            <a:r>
-              <a:rPr lang="en-US" dirty="0" err="1"/>
-              <a:t>buret</a:t>
-            </a:r>
-            <a:endParaRPr lang="en-US" dirty="0"/>
-          </a:p>
-          <a:p>
-            <a:pPr marL="457200" indent="-457200">
-              <a:buFont typeface="+mj-lt"/>
-              <a:buAutoNum type="arabicPeriod" startAt="9"/>
-            </a:pPr>
-            <a:r>
-              <a:rPr lang="en-US" dirty="0"/>
-              <a:t> Drop-by-drop titration</a:t>
-            </a:r>
-          </a:p>
-          <a:p>
-            <a:pPr marL="693738" lvl="1" indent="-457200">
-              <a:buFont typeface="+mj-lt"/>
-              <a:buAutoNum type="alphaLcParenR"/>
-            </a:pPr>
-            <a:r>
-              <a:rPr lang="en-US" dirty="0"/>
-              <a:t>The stopcock will be turned only to permit drop by drop addition of NaOH. Turn the stopcock on and off in controlled manner to dispense drops as necessary. As flask is swirled with each drop, look for pink color to appear. With each drop, the color may disappear more slowly. As the endpoint is reached, a very faint pink color will persist in solution.</a:t>
-            </a:r>
-          </a:p>
-          <a:p>
-            <a:pPr marL="693738" lvl="1" indent="-457200">
-              <a:buFont typeface="+mj-lt"/>
-              <a:buAutoNum type="alphaLcParenR"/>
-            </a:pPr>
-            <a:r>
-              <a:rPr lang="en-US" dirty="0"/>
-              <a:t>The best control is to quickly rotate stopcock by 180°, or to form a tiny drop in the tip, and touch tip to inside of flask wall</a:t>
-            </a:r>
-          </a:p>
-        </p:txBody>
-      </p:sp>
-    </p:spTree>
-    <p:extLst>
-      <p:ext uri="{BB962C8B-B14F-4D97-AF65-F5344CB8AC3E}">
-        <p14:creationId xmlns:p14="http://schemas.microsoft.com/office/powerpoint/2010/main" val="3378126116"/>
+        <p14:creationId xmlns:p14="http://schemas.microsoft.com/office/powerpoint/2010/main" val="3952654810"/>
       </p:ext>
     </p:extLst>
   </p:cSld>
